--- a/docs/sunumlar/Repkon-HF901-Ust-Yonetim-Sunumu-2026-07.pptx
+++ b/docs/sunumlar/Repkon-HF901-Ust-Yonetim-Sunumu-2026-07.pptx
@@ -29793,14 +29793,34 @@
       </p:sp>
       <p:sp>
         <p:nvSpPr>
-          <p:cNvPr id="6" name="Text 3"/>
+          <p:cNvPr id="6" name="Shape 3"/>
           <p:cNvSpPr/>
           <p:nvPr/>
         </p:nvSpPr>
         <p:spPr>
           <a:xfrm>
-            <a:off x="548640" y="1371600"/>
-            <a:ext cx="10789920" cy="320040"/>
+            <a:off x="4389120" y="1298448"/>
+            <a:ext cx="109728" cy="109728"/>
+          </a:xfrm>
+          <a:prstGeom prst="ellipse">
+            <a:avLst/>
+          </a:prstGeom>
+          <a:solidFill>
+            <a:srgbClr val="CADCFC"/>
+          </a:solidFill>
+          <a:ln/>
+        </p:spPr>
+      </p:sp>
+      <p:sp>
+        <p:nvSpPr>
+          <p:cNvPr id="7" name="Text 4"/>
+          <p:cNvSpPr/>
+          <p:nvPr/>
+        </p:nvSpPr>
+        <p:spPr>
+          <a:xfrm>
+            <a:off x="4572000" y="1243584"/>
+            <a:ext cx="1371600" cy="228600"/>
           </a:xfrm>
           <a:prstGeom prst="rect">
             <a:avLst/>
@@ -29816,3343 +29836,1841 @@
               <a:buNone/>
             </a:pPr>
             <a:r>
-              <a:rPr lang="en-US" sz="1050" i="1" dirty="0">
+              <a:rPr lang="en-US" sz="1100" dirty="0">
                 <a:solidFill>
-                  <a:srgbClr val="8590A6"/>
+                  <a:srgbClr val="475569"/>
                 </a:solidFill>
                 <a:latin typeface="Calibri" pitchFamily="34" charset="0"/>
                 <a:ea typeface="Calibri" pitchFamily="34" charset="-122"/>
                 <a:cs typeface="Calibri" pitchFamily="34" charset="-120"/>
               </a:rPr>
-              <a:t>Karşılaştırma günlük ortalama bazındadır (dönemlerdeki kayıtlı gün sayısı farklı olduğundan toplamlar yerine ortalama kullanılmıştır).</a:t>
+              <a:t>Nisan–Mayıs</a:t>
             </a:r>
-            <a:endParaRPr lang="en-US" sz="1050" dirty="0"/>
+            <a:endParaRPr lang="en-US" sz="1100" dirty="0"/>
           </a:p>
         </p:txBody>
       </p:sp>
-      <p:graphicFrame>
-        <p:nvGraphicFramePr>
-          <p:cNvPr id="4" name="Table 0"/>
-          <p:cNvGraphicFramePr>
-            <a:graphicFrameLocks noGrp="1"/>
-          </p:cNvGraphicFramePr>
-          <p:nvPr>
-            <p:extLst>
-              <p:ext uri="{D42A27DB-BD31-4B8C-83A1-F6EECF244321}">
-                <p14:modId xmlns:p14="http://schemas.microsoft.com/office/powerpoint/2010/main" val="1579011935"/>
-              </p:ext>
-            </p:extLst>
-          </p:nvPr>
-        </p:nvGraphicFramePr>
-        <p:xfrm>
-          <a:off x="548640" y="1828800"/>
-          <a:ext cx="10789920" cy="914400"/>
-        </p:xfrm>
-        <a:graphic>
-          <a:graphicData uri="http://schemas.openxmlformats.org/drawingml/2006/table">
-            <a:tbl>
-              <a:tblPr/>
-              <a:tblGrid>
-                <a:gridCol w="3749040"/>
-                <a:gridCol w="2651760"/>
-                <a:gridCol w="2651760"/>
-                <a:gridCol w="1737360"/>
-              </a:tblGrid>
-              <a:tr h="306324">
-                <a:tc>
-                  <a:txBody>
-                    <a:bodyPr/>
-                    <a:lstStyle/>
-                    <a:p>
-                      <a:pPr algn="l" indent="0" marL="0">
-                        <a:buNone/>
-                      </a:pPr>
-                      <a:r>
-                        <a:rPr lang="en-US" sz="1100" b="1" dirty="0">
-                          <a:solidFill>
-                            <a:srgbClr val="FFFFFF"/>
-                          </a:solidFill>
-                          <a:latin typeface="Calibri" pitchFamily="34" charset="0"/>
-                          <a:ea typeface="Calibri" pitchFamily="34" charset="-122"/>
-                          <a:cs typeface="Calibri" pitchFamily="34" charset="-120"/>
-                        </a:rPr>
-                        <a:t>Hücre</a:t>
-                      </a:r>
-                      <a:endParaRPr lang="en-US" sz="1100" dirty="0">
-                        <a:latin typeface="Calibri" charset="0"/>
-                        <a:ea typeface="Calibri" charset="0"/>
-                        <a:cs typeface="Calibri" charset="0"/>
-                      </a:endParaRPr>
-                    </a:p>
-                  </a:txBody>
-                  <a:tcPr marL="91440" marR="91440" marT="45720" marB="45720" anchor="ctr">
-                    <a:lnL w="9525" cap="flat" cmpd="sng" algn="ctr">
-                      <a:solidFill>
-                        <a:srgbClr val="D8DEEC"/>
-                      </a:solidFill>
-                      <a:prstDash val="solid"/>
-                      <a:round/>
-                      <a:headEnd type="none" w="med" len="med"/>
-                      <a:tailEnd type="none" w="med" len="med"/>
-                    </a:lnL>
-                    <a:lnR w="9525" cap="flat" cmpd="sng" algn="ctr">
-                      <a:solidFill>
-                        <a:srgbClr val="D8DEEC"/>
-                      </a:solidFill>
-                      <a:prstDash val="solid"/>
-                      <a:round/>
-                      <a:headEnd type="none" w="med" len="med"/>
-                      <a:tailEnd type="none" w="med" len="med"/>
-                    </a:lnR>
-                    <a:lnT w="9525" cap="flat" cmpd="sng" algn="ctr">
-                      <a:solidFill>
-                        <a:srgbClr val="D8DEEC"/>
-                      </a:solidFill>
-                      <a:prstDash val="solid"/>
-                      <a:round/>
-                      <a:headEnd type="none" w="med" len="med"/>
-                      <a:tailEnd type="none" w="med" len="med"/>
-                    </a:lnT>
-                    <a:lnB w="9525" cap="flat" cmpd="sng" algn="ctr">
-                      <a:solidFill>
-                        <a:srgbClr val="D8DEEC"/>
-                      </a:solidFill>
-                      <a:prstDash val="solid"/>
-                      <a:round/>
-                      <a:headEnd type="none" w="med" len="med"/>
-                      <a:tailEnd type="none" w="med" len="med"/>
-                    </a:lnB>
-                    <a:solidFill>
-                      <a:srgbClr val="1E2761"/>
-                    </a:solidFill>
-                  </a:tcPr>
-                </a:tc>
-                <a:tc>
-                  <a:txBody>
-                    <a:bodyPr/>
-                    <a:lstStyle/>
-                    <a:p>
-                      <a:pPr algn="ctr" indent="0" marL="0">
-                        <a:buNone/>
-                      </a:pPr>
-                      <a:r>
-                        <a:rPr lang="en-US" sz="1100" b="1" dirty="0">
-                          <a:solidFill>
-                            <a:srgbClr val="FFFFFF"/>
-                          </a:solidFill>
-                          <a:latin typeface="Calibri" pitchFamily="34" charset="0"/>
-                          <a:ea typeface="Calibri" pitchFamily="34" charset="-122"/>
-                          <a:cs typeface="Calibri" pitchFamily="34" charset="-120"/>
-                        </a:rPr>
-                        <a:t>Nisan–Mayıs (adet/gün)</a:t>
-                      </a:r>
-                      <a:endParaRPr lang="en-US" sz="1100" dirty="0">
-                        <a:latin typeface="Calibri" charset="0"/>
-                        <a:ea typeface="Calibri" charset="0"/>
-                        <a:cs typeface="Calibri" charset="0"/>
-                      </a:endParaRPr>
-                    </a:p>
-                  </a:txBody>
-                  <a:tcPr marL="91440" marR="91440" marT="45720" marB="45720" anchor="ctr">
-                    <a:lnL w="9525" cap="flat" cmpd="sng" algn="ctr">
-                      <a:solidFill>
-                        <a:srgbClr val="D8DEEC"/>
-                      </a:solidFill>
-                      <a:prstDash val="solid"/>
-                      <a:round/>
-                      <a:headEnd type="none" w="med" len="med"/>
-                      <a:tailEnd type="none" w="med" len="med"/>
-                    </a:lnL>
-                    <a:lnR w="9525" cap="flat" cmpd="sng" algn="ctr">
-                      <a:solidFill>
-                        <a:srgbClr val="D8DEEC"/>
-                      </a:solidFill>
-                      <a:prstDash val="solid"/>
-                      <a:round/>
-                      <a:headEnd type="none" w="med" len="med"/>
-                      <a:tailEnd type="none" w="med" len="med"/>
-                    </a:lnR>
-                    <a:lnT w="9525" cap="flat" cmpd="sng" algn="ctr">
-                      <a:solidFill>
-                        <a:srgbClr val="D8DEEC"/>
-                      </a:solidFill>
-                      <a:prstDash val="solid"/>
-                      <a:round/>
-                      <a:headEnd type="none" w="med" len="med"/>
-                      <a:tailEnd type="none" w="med" len="med"/>
-                    </a:lnT>
-                    <a:lnB w="9525" cap="flat" cmpd="sng" algn="ctr">
-                      <a:solidFill>
-                        <a:srgbClr val="D8DEEC"/>
-                      </a:solidFill>
-                      <a:prstDash val="solid"/>
-                      <a:round/>
-                      <a:headEnd type="none" w="med" len="med"/>
-                      <a:tailEnd type="none" w="med" len="med"/>
-                    </a:lnB>
-                    <a:solidFill>
-                      <a:srgbClr val="1E2761"/>
-                    </a:solidFill>
-                  </a:tcPr>
-                </a:tc>
-                <a:tc>
-                  <a:txBody>
-                    <a:bodyPr/>
-                    <a:lstStyle/>
-                    <a:p>
-                      <a:pPr algn="ctr" indent="0" marL="0">
-                        <a:buNone/>
-                      </a:pPr>
-                      <a:r>
-                        <a:rPr lang="en-US" sz="1100" b="1" dirty="0">
-                          <a:solidFill>
-                            <a:srgbClr val="FFFFFF"/>
-                          </a:solidFill>
-                          <a:latin typeface="Calibri" pitchFamily="34" charset="0"/>
-                          <a:ea typeface="Calibri" pitchFamily="34" charset="-122"/>
-                          <a:cs typeface="Calibri" pitchFamily="34" charset="-120"/>
-                        </a:rPr>
-                        <a:t>Haziran–Temmuz (adet/gün)</a:t>
-                      </a:r>
-                      <a:endParaRPr lang="en-US" sz="1100" dirty="0">
-                        <a:latin typeface="Calibri" charset="0"/>
-                        <a:ea typeface="Calibri" charset="0"/>
-                        <a:cs typeface="Calibri" charset="0"/>
-                      </a:endParaRPr>
-                    </a:p>
-                  </a:txBody>
-                  <a:tcPr marL="91440" marR="91440" marT="45720" marB="45720" anchor="ctr">
-                    <a:lnL w="9525" cap="flat" cmpd="sng" algn="ctr">
-                      <a:solidFill>
-                        <a:srgbClr val="D8DEEC"/>
-                      </a:solidFill>
-                      <a:prstDash val="solid"/>
-                      <a:round/>
-                      <a:headEnd type="none" w="med" len="med"/>
-                      <a:tailEnd type="none" w="med" len="med"/>
-                    </a:lnL>
-                    <a:lnR w="9525" cap="flat" cmpd="sng" algn="ctr">
-                      <a:solidFill>
-                        <a:srgbClr val="D8DEEC"/>
-                      </a:solidFill>
-                      <a:prstDash val="solid"/>
-                      <a:round/>
-                      <a:headEnd type="none" w="med" len="med"/>
-                      <a:tailEnd type="none" w="med" len="med"/>
-                    </a:lnR>
-                    <a:lnT w="9525" cap="flat" cmpd="sng" algn="ctr">
-                      <a:solidFill>
-                        <a:srgbClr val="D8DEEC"/>
-                      </a:solidFill>
-                      <a:prstDash val="solid"/>
-                      <a:round/>
-                      <a:headEnd type="none" w="med" len="med"/>
-                      <a:tailEnd type="none" w="med" len="med"/>
-                    </a:lnT>
-                    <a:lnB w="9525" cap="flat" cmpd="sng" algn="ctr">
-                      <a:solidFill>
-                        <a:srgbClr val="D8DEEC"/>
-                      </a:solidFill>
-                      <a:prstDash val="solid"/>
-                      <a:round/>
-                      <a:headEnd type="none" w="med" len="med"/>
-                      <a:tailEnd type="none" w="med" len="med"/>
-                    </a:lnB>
-                    <a:solidFill>
-                      <a:srgbClr val="1E2761"/>
-                    </a:solidFill>
-                  </a:tcPr>
-                </a:tc>
-                <a:tc>
-                  <a:txBody>
-                    <a:bodyPr/>
-                    <a:lstStyle/>
-                    <a:p>
-                      <a:pPr algn="ctr" indent="0" marL="0">
-                        <a:buNone/>
-                      </a:pPr>
-                      <a:r>
-                        <a:rPr lang="en-US" sz="1100" b="1" dirty="0">
-                          <a:solidFill>
-                            <a:srgbClr val="FFFFFF"/>
-                          </a:solidFill>
-                          <a:latin typeface="Calibri" pitchFamily="34" charset="0"/>
-                          <a:ea typeface="Calibri" pitchFamily="34" charset="-122"/>
-                          <a:cs typeface="Calibri" pitchFamily="34" charset="-120"/>
-                        </a:rPr>
-                        <a:t>Değişim</a:t>
-                      </a:r>
-                      <a:endParaRPr lang="en-US" sz="1100" dirty="0">
-                        <a:latin typeface="Calibri" charset="0"/>
-                        <a:ea typeface="Calibri" charset="0"/>
-                        <a:cs typeface="Calibri" charset="0"/>
-                      </a:endParaRPr>
-                    </a:p>
-                  </a:txBody>
-                  <a:tcPr marL="91440" marR="91440" marT="45720" marB="45720" anchor="ctr">
-                    <a:lnL w="9525" cap="flat" cmpd="sng" algn="ctr">
-                      <a:solidFill>
-                        <a:srgbClr val="D8DEEC"/>
-                      </a:solidFill>
-                      <a:prstDash val="solid"/>
-                      <a:round/>
-                      <a:headEnd type="none" w="med" len="med"/>
-                      <a:tailEnd type="none" w="med" len="med"/>
-                    </a:lnL>
-                    <a:lnR w="9525" cap="flat" cmpd="sng" algn="ctr">
-                      <a:solidFill>
-                        <a:srgbClr val="D8DEEC"/>
-                      </a:solidFill>
-                      <a:prstDash val="solid"/>
-                      <a:round/>
-                      <a:headEnd type="none" w="med" len="med"/>
-                      <a:tailEnd type="none" w="med" len="med"/>
-                    </a:lnR>
-                    <a:lnT w="9525" cap="flat" cmpd="sng" algn="ctr">
-                      <a:solidFill>
-                        <a:srgbClr val="D8DEEC"/>
-                      </a:solidFill>
-                      <a:prstDash val="solid"/>
-                      <a:round/>
-                      <a:headEnd type="none" w="med" len="med"/>
-                      <a:tailEnd type="none" w="med" len="med"/>
-                    </a:lnT>
-                    <a:lnB w="9525" cap="flat" cmpd="sng" algn="ctr">
-                      <a:solidFill>
-                        <a:srgbClr val="D8DEEC"/>
-                      </a:solidFill>
-                      <a:prstDash val="solid"/>
-                      <a:round/>
-                      <a:headEnd type="none" w="med" len="med"/>
-                      <a:tailEnd type="none" w="med" len="med"/>
-                    </a:lnB>
-                    <a:solidFill>
-                      <a:srgbClr val="1E2761"/>
-                    </a:solidFill>
-                  </a:tcPr>
-                </a:tc>
-              </a:tr>
-              <a:tr h="306324">
-                <a:tc>
-                  <a:txBody>
-                    <a:bodyPr/>
-                    <a:lstStyle/>
-                    <a:p>
-                      <a:pPr algn="l" indent="0" marL="0">
-                        <a:buNone/>
-                      </a:pPr>
-                      <a:r>
-                        <a:rPr lang="en-US" sz="1100" dirty="0">
-                          <a:solidFill>
-                            <a:srgbClr val="475569"/>
-                          </a:solidFill>
-                          <a:latin typeface="Calibri" pitchFamily="34" charset="0"/>
-                          <a:ea typeface="Calibri" pitchFamily="34" charset="-122"/>
-                          <a:cs typeface="Calibri" pitchFamily="34" charset="-120"/>
-                        </a:rPr>
-                        <a:t>Pres Hücresi</a:t>
-                      </a:r>
-                      <a:endParaRPr lang="en-US" sz="1100" dirty="0">
-                        <a:latin typeface="Calibri" charset="0"/>
-                        <a:ea typeface="Calibri" charset="0"/>
-                        <a:cs typeface="Calibri" charset="0"/>
-                      </a:endParaRPr>
-                    </a:p>
-                  </a:txBody>
-                  <a:tcPr marL="91440" marR="91440" marT="45720" marB="45720" anchor="ctr">
-                    <a:lnL w="9525" cap="flat" cmpd="sng" algn="ctr">
-                      <a:solidFill>
-                        <a:srgbClr val="D8DEEC"/>
-                      </a:solidFill>
-                      <a:prstDash val="solid"/>
-                      <a:round/>
-                      <a:headEnd type="none" w="med" len="med"/>
-                      <a:tailEnd type="none" w="med" len="med"/>
-                    </a:lnL>
-                    <a:lnR w="9525" cap="flat" cmpd="sng" algn="ctr">
-                      <a:solidFill>
-                        <a:srgbClr val="D8DEEC"/>
-                      </a:solidFill>
-                      <a:prstDash val="solid"/>
-                      <a:round/>
-                      <a:headEnd type="none" w="med" len="med"/>
-                      <a:tailEnd type="none" w="med" len="med"/>
-                    </a:lnR>
-                    <a:lnT w="9525" cap="flat" cmpd="sng" algn="ctr">
-                      <a:solidFill>
-                        <a:srgbClr val="D8DEEC"/>
-                      </a:solidFill>
-                      <a:prstDash val="solid"/>
-                      <a:round/>
-                      <a:headEnd type="none" w="med" len="med"/>
-                      <a:tailEnd type="none" w="med" len="med"/>
-                    </a:lnT>
-                    <a:lnB w="9525" cap="flat" cmpd="sng" algn="ctr">
-                      <a:solidFill>
-                        <a:srgbClr val="D8DEEC"/>
-                      </a:solidFill>
-                      <a:prstDash val="solid"/>
-                      <a:round/>
-                      <a:headEnd type="none" w="med" len="med"/>
-                      <a:tailEnd type="none" w="med" len="med"/>
-                    </a:lnB>
-                    <a:solidFill>
-                      <a:srgbClr val="FFFFFF"/>
-                    </a:solidFill>
-                  </a:tcPr>
-                </a:tc>
-                <a:tc>
-                  <a:txBody>
-                    <a:bodyPr/>
-                    <a:lstStyle/>
-                    <a:p>
-                      <a:pPr algn="ctr" indent="0" marL="0">
-                        <a:buNone/>
-                      </a:pPr>
-                      <a:r>
-                        <a:rPr lang="en-US" sz="1100" dirty="0">
-                          <a:solidFill>
-                            <a:srgbClr val="475569"/>
-                          </a:solidFill>
-                          <a:latin typeface="Calibri" pitchFamily="34" charset="0"/>
-                          <a:ea typeface="Calibri" pitchFamily="34" charset="-122"/>
-                          <a:cs typeface="Calibri" pitchFamily="34" charset="-120"/>
-                        </a:rPr>
-                        <a:t>81.5</a:t>
-                      </a:r>
-                      <a:endParaRPr lang="en-US" sz="1100" dirty="0">
-                        <a:latin typeface="Calibri" charset="0"/>
-                        <a:ea typeface="Calibri" charset="0"/>
-                        <a:cs typeface="Calibri" charset="0"/>
-                      </a:endParaRPr>
-                    </a:p>
-                  </a:txBody>
-                  <a:tcPr marL="91440" marR="91440" marT="45720" marB="45720" anchor="ctr">
-                    <a:lnL w="9525" cap="flat" cmpd="sng" algn="ctr">
-                      <a:solidFill>
-                        <a:srgbClr val="D8DEEC"/>
-                      </a:solidFill>
-                      <a:prstDash val="solid"/>
-                      <a:round/>
-                      <a:headEnd type="none" w="med" len="med"/>
-                      <a:tailEnd type="none" w="med" len="med"/>
-                    </a:lnL>
-                    <a:lnR w="9525" cap="flat" cmpd="sng" algn="ctr">
-                      <a:solidFill>
-                        <a:srgbClr val="D8DEEC"/>
-                      </a:solidFill>
-                      <a:prstDash val="solid"/>
-                      <a:round/>
-                      <a:headEnd type="none" w="med" len="med"/>
-                      <a:tailEnd type="none" w="med" len="med"/>
-                    </a:lnR>
-                    <a:lnT w="9525" cap="flat" cmpd="sng" algn="ctr">
-                      <a:solidFill>
-                        <a:srgbClr val="D8DEEC"/>
-                      </a:solidFill>
-                      <a:prstDash val="solid"/>
-                      <a:round/>
-                      <a:headEnd type="none" w="med" len="med"/>
-                      <a:tailEnd type="none" w="med" len="med"/>
-                    </a:lnT>
-                    <a:lnB w="9525" cap="flat" cmpd="sng" algn="ctr">
-                      <a:solidFill>
-                        <a:srgbClr val="D8DEEC"/>
-                      </a:solidFill>
-                      <a:prstDash val="solid"/>
-                      <a:round/>
-                      <a:headEnd type="none" w="med" len="med"/>
-                      <a:tailEnd type="none" w="med" len="med"/>
-                    </a:lnB>
-                    <a:solidFill>
-                      <a:srgbClr val="FFFFFF"/>
-                    </a:solidFill>
-                  </a:tcPr>
-                </a:tc>
-                <a:tc>
-                  <a:txBody>
-                    <a:bodyPr/>
-                    <a:lstStyle/>
-                    <a:p>
-                      <a:pPr algn="ctr" indent="0" marL="0">
-                        <a:buNone/>
-                      </a:pPr>
-                      <a:r>
-                        <a:rPr lang="en-US" sz="1100" dirty="0">
-                          <a:solidFill>
-                            <a:srgbClr val="475569"/>
-                          </a:solidFill>
-                          <a:latin typeface="Calibri" pitchFamily="34" charset="0"/>
-                          <a:ea typeface="Calibri" pitchFamily="34" charset="-122"/>
-                          <a:cs typeface="Calibri" pitchFamily="34" charset="-120"/>
-                        </a:rPr>
-                        <a:t>128.5</a:t>
-                      </a:r>
-                      <a:endParaRPr lang="en-US" sz="1100" dirty="0">
-                        <a:latin typeface="Calibri" charset="0"/>
-                        <a:ea typeface="Calibri" charset="0"/>
-                        <a:cs typeface="Calibri" charset="0"/>
-                      </a:endParaRPr>
-                    </a:p>
-                  </a:txBody>
-                  <a:tcPr marL="91440" marR="91440" marT="45720" marB="45720" anchor="ctr">
-                    <a:lnL w="9525" cap="flat" cmpd="sng" algn="ctr">
-                      <a:solidFill>
-                        <a:srgbClr val="D8DEEC"/>
-                      </a:solidFill>
-                      <a:prstDash val="solid"/>
-                      <a:round/>
-                      <a:headEnd type="none" w="med" len="med"/>
-                      <a:tailEnd type="none" w="med" len="med"/>
-                    </a:lnL>
-                    <a:lnR w="9525" cap="flat" cmpd="sng" algn="ctr">
-                      <a:solidFill>
-                        <a:srgbClr val="D8DEEC"/>
-                      </a:solidFill>
-                      <a:prstDash val="solid"/>
-                      <a:round/>
-                      <a:headEnd type="none" w="med" len="med"/>
-                      <a:tailEnd type="none" w="med" len="med"/>
-                    </a:lnR>
-                    <a:lnT w="9525" cap="flat" cmpd="sng" algn="ctr">
-                      <a:solidFill>
-                        <a:srgbClr val="D8DEEC"/>
-                      </a:solidFill>
-                      <a:prstDash val="solid"/>
-                      <a:round/>
-                      <a:headEnd type="none" w="med" len="med"/>
-                      <a:tailEnd type="none" w="med" len="med"/>
-                    </a:lnT>
-                    <a:lnB w="9525" cap="flat" cmpd="sng" algn="ctr">
-                      <a:solidFill>
-                        <a:srgbClr val="D8DEEC"/>
-                      </a:solidFill>
-                      <a:prstDash val="solid"/>
-                      <a:round/>
-                      <a:headEnd type="none" w="med" len="med"/>
-                      <a:tailEnd type="none" w="med" len="med"/>
-                    </a:lnB>
-                    <a:solidFill>
-                      <a:srgbClr val="FFFFFF"/>
-                    </a:solidFill>
-                  </a:tcPr>
-                </a:tc>
-                <a:tc>
-                  <a:txBody>
-                    <a:bodyPr/>
-                    <a:lstStyle/>
-                    <a:p>
-                      <a:pPr algn="ctr" indent="0" marL="0">
-                        <a:buNone/>
-                      </a:pPr>
-                      <a:r>
-                        <a:rPr lang="en-US" sz="1100" b="1" dirty="0">
-                          <a:solidFill>
-                            <a:srgbClr val="15803D"/>
-                          </a:solidFill>
-                          <a:latin typeface="Calibri" pitchFamily="34" charset="0"/>
-                          <a:ea typeface="Calibri" pitchFamily="34" charset="-122"/>
-                          <a:cs typeface="Calibri" pitchFamily="34" charset="-120"/>
-                        </a:rPr>
-                        <a:t>+58%</a:t>
-                      </a:r>
-                      <a:endParaRPr lang="en-US" sz="1100" dirty="0">
-                        <a:latin typeface="Calibri" charset="0"/>
-                        <a:ea typeface="Calibri" charset="0"/>
-                        <a:cs typeface="Calibri" charset="0"/>
-                      </a:endParaRPr>
-                    </a:p>
-                  </a:txBody>
-                  <a:tcPr marL="91440" marR="91440" marT="45720" marB="45720" anchor="ctr">
-                    <a:lnL w="9525" cap="flat" cmpd="sng" algn="ctr">
-                      <a:solidFill>
-                        <a:srgbClr val="D8DEEC"/>
-                      </a:solidFill>
-                      <a:prstDash val="solid"/>
-                      <a:round/>
-                      <a:headEnd type="none" w="med" len="med"/>
-                      <a:tailEnd type="none" w="med" len="med"/>
-                    </a:lnL>
-                    <a:lnR w="9525" cap="flat" cmpd="sng" algn="ctr">
-                      <a:solidFill>
-                        <a:srgbClr val="D8DEEC"/>
-                      </a:solidFill>
-                      <a:prstDash val="solid"/>
-                      <a:round/>
-                      <a:headEnd type="none" w="med" len="med"/>
-                      <a:tailEnd type="none" w="med" len="med"/>
-                    </a:lnR>
-                    <a:lnT w="9525" cap="flat" cmpd="sng" algn="ctr">
-                      <a:solidFill>
-                        <a:srgbClr val="D8DEEC"/>
-                      </a:solidFill>
-                      <a:prstDash val="solid"/>
-                      <a:round/>
-                      <a:headEnd type="none" w="med" len="med"/>
-                      <a:tailEnd type="none" w="med" len="med"/>
-                    </a:lnT>
-                    <a:lnB w="9525" cap="flat" cmpd="sng" algn="ctr">
-                      <a:solidFill>
-                        <a:srgbClr val="D8DEEC"/>
-                      </a:solidFill>
-                      <a:prstDash val="solid"/>
-                      <a:round/>
-                      <a:headEnd type="none" w="med" len="med"/>
-                      <a:tailEnd type="none" w="med" len="med"/>
-                    </a:lnB>
-                    <a:solidFill>
-                      <a:srgbClr val="FFFFFF"/>
-                    </a:solidFill>
-                  </a:tcPr>
-                </a:tc>
-              </a:tr>
-              <a:tr h="306324">
-                <a:tc>
-                  <a:txBody>
-                    <a:bodyPr/>
-                    <a:lstStyle/>
-                    <a:p>
-                      <a:pPr algn="l" indent="0" marL="0">
-                        <a:buNone/>
-                      </a:pPr>
-                      <a:r>
-                        <a:rPr lang="en-US" sz="1100" dirty="0">
-                          <a:solidFill>
-                            <a:srgbClr val="475569"/>
-                          </a:solidFill>
-                          <a:latin typeface="Calibri" pitchFamily="34" charset="0"/>
-                          <a:ea typeface="Calibri" pitchFamily="34" charset="-122"/>
-                          <a:cs typeface="Calibri" pitchFamily="34" charset="-120"/>
-                        </a:rPr>
-                        <a:t>ETM Hücresi</a:t>
-                      </a:r>
-                      <a:endParaRPr lang="en-US" sz="1100" dirty="0">
-                        <a:latin typeface="Calibri" charset="0"/>
-                        <a:ea typeface="Calibri" charset="0"/>
-                        <a:cs typeface="Calibri" charset="0"/>
-                      </a:endParaRPr>
-                    </a:p>
-                  </a:txBody>
-                  <a:tcPr marL="91440" marR="91440" marT="45720" marB="45720" anchor="ctr">
-                    <a:lnL w="9525" cap="flat" cmpd="sng" algn="ctr">
-                      <a:solidFill>
-                        <a:srgbClr val="D8DEEC"/>
-                      </a:solidFill>
-                      <a:prstDash val="solid"/>
-                      <a:round/>
-                      <a:headEnd type="none" w="med" len="med"/>
-                      <a:tailEnd type="none" w="med" len="med"/>
-                    </a:lnL>
-                    <a:lnR w="9525" cap="flat" cmpd="sng" algn="ctr">
-                      <a:solidFill>
-                        <a:srgbClr val="D8DEEC"/>
-                      </a:solidFill>
-                      <a:prstDash val="solid"/>
-                      <a:round/>
-                      <a:headEnd type="none" w="med" len="med"/>
-                      <a:tailEnd type="none" w="med" len="med"/>
-                    </a:lnR>
-                    <a:lnT w="9525" cap="flat" cmpd="sng" algn="ctr">
-                      <a:solidFill>
-                        <a:srgbClr val="D8DEEC"/>
-                      </a:solidFill>
-                      <a:prstDash val="solid"/>
-                      <a:round/>
-                      <a:headEnd type="none" w="med" len="med"/>
-                      <a:tailEnd type="none" w="med" len="med"/>
-                    </a:lnT>
-                    <a:lnB w="9525" cap="flat" cmpd="sng" algn="ctr">
-                      <a:solidFill>
-                        <a:srgbClr val="D8DEEC"/>
-                      </a:solidFill>
-                      <a:prstDash val="solid"/>
-                      <a:round/>
-                      <a:headEnd type="none" w="med" len="med"/>
-                      <a:tailEnd type="none" w="med" len="med"/>
-                    </a:lnB>
-                    <a:solidFill>
-                      <a:srgbClr val="EEF2FC"/>
-                    </a:solidFill>
-                  </a:tcPr>
-                </a:tc>
-                <a:tc>
-                  <a:txBody>
-                    <a:bodyPr/>
-                    <a:lstStyle/>
-                    <a:p>
-                      <a:pPr algn="ctr" indent="0" marL="0">
-                        <a:buNone/>
-                      </a:pPr>
-                      <a:r>
-                        <a:rPr lang="en-US" sz="1100" dirty="0">
-                          <a:solidFill>
-                            <a:srgbClr val="475569"/>
-                          </a:solidFill>
-                          <a:latin typeface="Calibri" pitchFamily="34" charset="0"/>
-                          <a:ea typeface="Calibri" pitchFamily="34" charset="-122"/>
-                          <a:cs typeface="Calibri" pitchFamily="34" charset="-120"/>
-                        </a:rPr>
-                        <a:t>51.4</a:t>
-                      </a:r>
-                      <a:endParaRPr lang="en-US" sz="1100" dirty="0">
-                        <a:latin typeface="Calibri" charset="0"/>
-                        <a:ea typeface="Calibri" charset="0"/>
-                        <a:cs typeface="Calibri" charset="0"/>
-                      </a:endParaRPr>
-                    </a:p>
-                  </a:txBody>
-                  <a:tcPr marL="91440" marR="91440" marT="45720" marB="45720" anchor="ctr">
-                    <a:lnL w="9525" cap="flat" cmpd="sng" algn="ctr">
-                      <a:solidFill>
-                        <a:srgbClr val="D8DEEC"/>
-                      </a:solidFill>
-                      <a:prstDash val="solid"/>
-                      <a:round/>
-                      <a:headEnd type="none" w="med" len="med"/>
-                      <a:tailEnd type="none" w="med" len="med"/>
-                    </a:lnL>
-                    <a:lnR w="9525" cap="flat" cmpd="sng" algn="ctr">
-                      <a:solidFill>
-                        <a:srgbClr val="D8DEEC"/>
-                      </a:solidFill>
-                      <a:prstDash val="solid"/>
-                      <a:round/>
-                      <a:headEnd type="none" w="med" len="med"/>
-                      <a:tailEnd type="none" w="med" len="med"/>
-                    </a:lnR>
-                    <a:lnT w="9525" cap="flat" cmpd="sng" algn="ctr">
-                      <a:solidFill>
-                        <a:srgbClr val="D8DEEC"/>
-                      </a:solidFill>
-                      <a:prstDash val="solid"/>
-                      <a:round/>
-                      <a:headEnd type="none" w="med" len="med"/>
-                      <a:tailEnd type="none" w="med" len="med"/>
-                    </a:lnT>
-                    <a:lnB w="9525" cap="flat" cmpd="sng" algn="ctr">
-                      <a:solidFill>
-                        <a:srgbClr val="D8DEEC"/>
-                      </a:solidFill>
-                      <a:prstDash val="solid"/>
-                      <a:round/>
-                      <a:headEnd type="none" w="med" len="med"/>
-                      <a:tailEnd type="none" w="med" len="med"/>
-                    </a:lnB>
-                    <a:solidFill>
-                      <a:srgbClr val="EEF2FC"/>
-                    </a:solidFill>
-                  </a:tcPr>
-                </a:tc>
-                <a:tc>
-                  <a:txBody>
-                    <a:bodyPr/>
-                    <a:lstStyle/>
-                    <a:p>
-                      <a:pPr algn="ctr" indent="0" marL="0">
-                        <a:buNone/>
-                      </a:pPr>
-                      <a:r>
-                        <a:rPr lang="en-US" sz="1100" dirty="0">
-                          <a:solidFill>
-                            <a:srgbClr val="475569"/>
-                          </a:solidFill>
-                          <a:latin typeface="Calibri" pitchFamily="34" charset="0"/>
-                          <a:ea typeface="Calibri" pitchFamily="34" charset="-122"/>
-                          <a:cs typeface="Calibri" pitchFamily="34" charset="-120"/>
-                        </a:rPr>
-                        <a:t>138.1</a:t>
-                      </a:r>
-                      <a:endParaRPr lang="en-US" sz="1100" dirty="0">
-                        <a:latin typeface="Calibri" charset="0"/>
-                        <a:ea typeface="Calibri" charset="0"/>
-                        <a:cs typeface="Calibri" charset="0"/>
-                      </a:endParaRPr>
-                    </a:p>
-                  </a:txBody>
-                  <a:tcPr marL="91440" marR="91440" marT="45720" marB="45720" anchor="ctr">
-                    <a:lnL w="9525" cap="flat" cmpd="sng" algn="ctr">
-                      <a:solidFill>
-                        <a:srgbClr val="D8DEEC"/>
-                      </a:solidFill>
-                      <a:prstDash val="solid"/>
-                      <a:round/>
-                      <a:headEnd type="none" w="med" len="med"/>
-                      <a:tailEnd type="none" w="med" len="med"/>
-                    </a:lnL>
-                    <a:lnR w="9525" cap="flat" cmpd="sng" algn="ctr">
-                      <a:solidFill>
-                        <a:srgbClr val="D8DEEC"/>
-                      </a:solidFill>
-                      <a:prstDash val="solid"/>
-                      <a:round/>
-                      <a:headEnd type="none" w="med" len="med"/>
-                      <a:tailEnd type="none" w="med" len="med"/>
-                    </a:lnR>
-                    <a:lnT w="9525" cap="flat" cmpd="sng" algn="ctr">
-                      <a:solidFill>
-                        <a:srgbClr val="D8DEEC"/>
-                      </a:solidFill>
-                      <a:prstDash val="solid"/>
-                      <a:round/>
-                      <a:headEnd type="none" w="med" len="med"/>
-                      <a:tailEnd type="none" w="med" len="med"/>
-                    </a:lnT>
-                    <a:lnB w="9525" cap="flat" cmpd="sng" algn="ctr">
-                      <a:solidFill>
-                        <a:srgbClr val="D8DEEC"/>
-                      </a:solidFill>
-                      <a:prstDash val="solid"/>
-                      <a:round/>
-                      <a:headEnd type="none" w="med" len="med"/>
-                      <a:tailEnd type="none" w="med" len="med"/>
-                    </a:lnB>
-                    <a:solidFill>
-                      <a:srgbClr val="EEF2FC"/>
-                    </a:solidFill>
-                  </a:tcPr>
-                </a:tc>
-                <a:tc>
-                  <a:txBody>
-                    <a:bodyPr/>
-                    <a:lstStyle/>
-                    <a:p>
-                      <a:pPr algn="ctr" indent="0" marL="0">
-                        <a:buNone/>
-                      </a:pPr>
-                      <a:r>
-                        <a:rPr lang="en-US" sz="1100" b="1" dirty="0">
-                          <a:solidFill>
-                            <a:srgbClr val="15803D"/>
-                          </a:solidFill>
-                          <a:latin typeface="Calibri" pitchFamily="34" charset="0"/>
-                          <a:ea typeface="Calibri" pitchFamily="34" charset="-122"/>
-                          <a:cs typeface="Calibri" pitchFamily="34" charset="-120"/>
-                        </a:rPr>
-                        <a:t>+169%</a:t>
-                      </a:r>
-                      <a:endParaRPr lang="en-US" sz="1100" dirty="0">
-                        <a:latin typeface="Calibri" charset="0"/>
-                        <a:ea typeface="Calibri" charset="0"/>
-                        <a:cs typeface="Calibri" charset="0"/>
-                      </a:endParaRPr>
-                    </a:p>
-                  </a:txBody>
-                  <a:tcPr marL="91440" marR="91440" marT="45720" marB="45720" anchor="ctr">
-                    <a:lnL w="9525" cap="flat" cmpd="sng" algn="ctr">
-                      <a:solidFill>
-                        <a:srgbClr val="D8DEEC"/>
-                      </a:solidFill>
-                      <a:prstDash val="solid"/>
-                      <a:round/>
-                      <a:headEnd type="none" w="med" len="med"/>
-                      <a:tailEnd type="none" w="med" len="med"/>
-                    </a:lnL>
-                    <a:lnR w="9525" cap="flat" cmpd="sng" algn="ctr">
-                      <a:solidFill>
-                        <a:srgbClr val="D8DEEC"/>
-                      </a:solidFill>
-                      <a:prstDash val="solid"/>
-                      <a:round/>
-                      <a:headEnd type="none" w="med" len="med"/>
-                      <a:tailEnd type="none" w="med" len="med"/>
-                    </a:lnR>
-                    <a:lnT w="9525" cap="flat" cmpd="sng" algn="ctr">
-                      <a:solidFill>
-                        <a:srgbClr val="D8DEEC"/>
-                      </a:solidFill>
-                      <a:prstDash val="solid"/>
-                      <a:round/>
-                      <a:headEnd type="none" w="med" len="med"/>
-                      <a:tailEnd type="none" w="med" len="med"/>
-                    </a:lnT>
-                    <a:lnB w="9525" cap="flat" cmpd="sng" algn="ctr">
-                      <a:solidFill>
-                        <a:srgbClr val="D8DEEC"/>
-                      </a:solidFill>
-                      <a:prstDash val="solid"/>
-                      <a:round/>
-                      <a:headEnd type="none" w="med" len="med"/>
-                      <a:tailEnd type="none" w="med" len="med"/>
-                    </a:lnB>
-                    <a:solidFill>
-                      <a:srgbClr val="EEF2FC"/>
-                    </a:solidFill>
-                  </a:tcPr>
-                </a:tc>
-              </a:tr>
-              <a:tr h="306324">
-                <a:tc>
-                  <a:txBody>
-                    <a:bodyPr/>
-                    <a:lstStyle/>
-                    <a:p>
-                      <a:pPr algn="l" indent="0" marL="0">
-                        <a:buNone/>
-                      </a:pPr>
-                      <a:r>
-                        <a:rPr lang="en-US" sz="1100" dirty="0">
-                          <a:solidFill>
-                            <a:srgbClr val="475569"/>
-                          </a:solidFill>
-                          <a:latin typeface="Calibri" pitchFamily="34" charset="0"/>
-                          <a:ea typeface="Calibri" pitchFamily="34" charset="-122"/>
-                          <a:cs typeface="Calibri" pitchFamily="34" charset="-120"/>
-                        </a:rPr>
-                        <a:t>ROB108 Hücresi</a:t>
-                      </a:r>
-                      <a:endParaRPr lang="en-US" sz="1100" dirty="0">
-                        <a:latin typeface="Calibri" charset="0"/>
-                        <a:ea typeface="Calibri" charset="0"/>
-                        <a:cs typeface="Calibri" charset="0"/>
-                      </a:endParaRPr>
-                    </a:p>
-                  </a:txBody>
-                  <a:tcPr marL="91440" marR="91440" marT="45720" marB="45720" anchor="ctr">
-                    <a:lnL w="9525" cap="flat" cmpd="sng" algn="ctr">
-                      <a:solidFill>
-                        <a:srgbClr val="D8DEEC"/>
-                      </a:solidFill>
-                      <a:prstDash val="solid"/>
-                      <a:round/>
-                      <a:headEnd type="none" w="med" len="med"/>
-                      <a:tailEnd type="none" w="med" len="med"/>
-                    </a:lnL>
-                    <a:lnR w="9525" cap="flat" cmpd="sng" algn="ctr">
-                      <a:solidFill>
-                        <a:srgbClr val="D8DEEC"/>
-                      </a:solidFill>
-                      <a:prstDash val="solid"/>
-                      <a:round/>
-                      <a:headEnd type="none" w="med" len="med"/>
-                      <a:tailEnd type="none" w="med" len="med"/>
-                    </a:lnR>
-                    <a:lnT w="9525" cap="flat" cmpd="sng" algn="ctr">
-                      <a:solidFill>
-                        <a:srgbClr val="D8DEEC"/>
-                      </a:solidFill>
-                      <a:prstDash val="solid"/>
-                      <a:round/>
-                      <a:headEnd type="none" w="med" len="med"/>
-                      <a:tailEnd type="none" w="med" len="med"/>
-                    </a:lnT>
-                    <a:lnB w="9525" cap="flat" cmpd="sng" algn="ctr">
-                      <a:solidFill>
-                        <a:srgbClr val="D8DEEC"/>
-                      </a:solidFill>
-                      <a:prstDash val="solid"/>
-                      <a:round/>
-                      <a:headEnd type="none" w="med" len="med"/>
-                      <a:tailEnd type="none" w="med" len="med"/>
-                    </a:lnB>
-                    <a:solidFill>
-                      <a:srgbClr val="FFFFFF"/>
-                    </a:solidFill>
-                  </a:tcPr>
-                </a:tc>
-                <a:tc>
-                  <a:txBody>
-                    <a:bodyPr/>
-                    <a:lstStyle/>
-                    <a:p>
-                      <a:pPr algn="ctr" indent="0" marL="0">
-                        <a:buNone/>
-                      </a:pPr>
-                      <a:r>
-                        <a:rPr lang="en-US" sz="1100" dirty="0">
-                          <a:solidFill>
-                            <a:srgbClr val="475569"/>
-                          </a:solidFill>
-                          <a:latin typeface="Calibri" pitchFamily="34" charset="0"/>
-                          <a:ea typeface="Calibri" pitchFamily="34" charset="-122"/>
-                          <a:cs typeface="Calibri" pitchFamily="34" charset="-120"/>
-                        </a:rPr>
-                        <a:t>44.4</a:t>
-                      </a:r>
-                      <a:endParaRPr lang="en-US" sz="1100" dirty="0">
-                        <a:latin typeface="Calibri" charset="0"/>
-                        <a:ea typeface="Calibri" charset="0"/>
-                        <a:cs typeface="Calibri" charset="0"/>
-                      </a:endParaRPr>
-                    </a:p>
-                  </a:txBody>
-                  <a:tcPr marL="91440" marR="91440" marT="45720" marB="45720" anchor="ctr">
-                    <a:lnL w="9525" cap="flat" cmpd="sng" algn="ctr">
-                      <a:solidFill>
-                        <a:srgbClr val="D8DEEC"/>
-                      </a:solidFill>
-                      <a:prstDash val="solid"/>
-                      <a:round/>
-                      <a:headEnd type="none" w="med" len="med"/>
-                      <a:tailEnd type="none" w="med" len="med"/>
-                    </a:lnL>
-                    <a:lnR w="9525" cap="flat" cmpd="sng" algn="ctr">
-                      <a:solidFill>
-                        <a:srgbClr val="D8DEEC"/>
-                      </a:solidFill>
-                      <a:prstDash val="solid"/>
-                      <a:round/>
-                      <a:headEnd type="none" w="med" len="med"/>
-                      <a:tailEnd type="none" w="med" len="med"/>
-                    </a:lnR>
-                    <a:lnT w="9525" cap="flat" cmpd="sng" algn="ctr">
-                      <a:solidFill>
-                        <a:srgbClr val="D8DEEC"/>
-                      </a:solidFill>
-                      <a:prstDash val="solid"/>
-                      <a:round/>
-                      <a:headEnd type="none" w="med" len="med"/>
-                      <a:tailEnd type="none" w="med" len="med"/>
-                    </a:lnT>
-                    <a:lnB w="9525" cap="flat" cmpd="sng" algn="ctr">
-                      <a:solidFill>
-                        <a:srgbClr val="D8DEEC"/>
-                      </a:solidFill>
-                      <a:prstDash val="solid"/>
-                      <a:round/>
-                      <a:headEnd type="none" w="med" len="med"/>
-                      <a:tailEnd type="none" w="med" len="med"/>
-                    </a:lnB>
-                    <a:solidFill>
-                      <a:srgbClr val="FFFFFF"/>
-                    </a:solidFill>
-                  </a:tcPr>
-                </a:tc>
-                <a:tc>
-                  <a:txBody>
-                    <a:bodyPr/>
-                    <a:lstStyle/>
-                    <a:p>
-                      <a:pPr algn="ctr" indent="0" marL="0">
-                        <a:buNone/>
-                      </a:pPr>
-                      <a:r>
-                        <a:rPr lang="en-US" sz="1100" dirty="0">
-                          <a:solidFill>
-                            <a:srgbClr val="475569"/>
-                          </a:solidFill>
-                          <a:latin typeface="Calibri" pitchFamily="34" charset="0"/>
-                          <a:ea typeface="Calibri" pitchFamily="34" charset="-122"/>
-                          <a:cs typeface="Calibri" pitchFamily="34" charset="-120"/>
-                        </a:rPr>
-                        <a:t>108.7</a:t>
-                      </a:r>
-                      <a:endParaRPr lang="en-US" sz="1100" dirty="0">
-                        <a:latin typeface="Calibri" charset="0"/>
-                        <a:ea typeface="Calibri" charset="0"/>
-                        <a:cs typeface="Calibri" charset="0"/>
-                      </a:endParaRPr>
-                    </a:p>
-                  </a:txBody>
-                  <a:tcPr marL="91440" marR="91440" marT="45720" marB="45720" anchor="ctr">
-                    <a:lnL w="9525" cap="flat" cmpd="sng" algn="ctr">
-                      <a:solidFill>
-                        <a:srgbClr val="D8DEEC"/>
-                      </a:solidFill>
-                      <a:prstDash val="solid"/>
-                      <a:round/>
-                      <a:headEnd type="none" w="med" len="med"/>
-                      <a:tailEnd type="none" w="med" len="med"/>
-                    </a:lnL>
-                    <a:lnR w="9525" cap="flat" cmpd="sng" algn="ctr">
-                      <a:solidFill>
-                        <a:srgbClr val="D8DEEC"/>
-                      </a:solidFill>
-                      <a:prstDash val="solid"/>
-                      <a:round/>
-                      <a:headEnd type="none" w="med" len="med"/>
-                      <a:tailEnd type="none" w="med" len="med"/>
-                    </a:lnR>
-                    <a:lnT w="9525" cap="flat" cmpd="sng" algn="ctr">
-                      <a:solidFill>
-                        <a:srgbClr val="D8DEEC"/>
-                      </a:solidFill>
-                      <a:prstDash val="solid"/>
-                      <a:round/>
-                      <a:headEnd type="none" w="med" len="med"/>
-                      <a:tailEnd type="none" w="med" len="med"/>
-                    </a:lnT>
-                    <a:lnB w="9525" cap="flat" cmpd="sng" algn="ctr">
-                      <a:solidFill>
-                        <a:srgbClr val="D8DEEC"/>
-                      </a:solidFill>
-                      <a:prstDash val="solid"/>
-                      <a:round/>
-                      <a:headEnd type="none" w="med" len="med"/>
-                      <a:tailEnd type="none" w="med" len="med"/>
-                    </a:lnB>
-                    <a:solidFill>
-                      <a:srgbClr val="FFFFFF"/>
-                    </a:solidFill>
-                  </a:tcPr>
-                </a:tc>
-                <a:tc>
-                  <a:txBody>
-                    <a:bodyPr/>
-                    <a:lstStyle/>
-                    <a:p>
-                      <a:pPr algn="ctr" indent="0" marL="0">
-                        <a:buNone/>
-                      </a:pPr>
-                      <a:r>
-                        <a:rPr lang="en-US" sz="1100" b="1" dirty="0">
-                          <a:solidFill>
-                            <a:srgbClr val="15803D"/>
-                          </a:solidFill>
-                          <a:latin typeface="Calibri" pitchFamily="34" charset="0"/>
-                          <a:ea typeface="Calibri" pitchFamily="34" charset="-122"/>
-                          <a:cs typeface="Calibri" pitchFamily="34" charset="-120"/>
-                        </a:rPr>
-                        <a:t>+145%</a:t>
-                      </a:r>
-                      <a:endParaRPr lang="en-US" sz="1100" dirty="0">
-                        <a:latin typeface="Calibri" charset="0"/>
-                        <a:ea typeface="Calibri" charset="0"/>
-                        <a:cs typeface="Calibri" charset="0"/>
-                      </a:endParaRPr>
-                    </a:p>
-                  </a:txBody>
-                  <a:tcPr marL="91440" marR="91440" marT="45720" marB="45720" anchor="ctr">
-                    <a:lnL w="9525" cap="flat" cmpd="sng" algn="ctr">
-                      <a:solidFill>
-                        <a:srgbClr val="D8DEEC"/>
-                      </a:solidFill>
-                      <a:prstDash val="solid"/>
-                      <a:round/>
-                      <a:headEnd type="none" w="med" len="med"/>
-                      <a:tailEnd type="none" w="med" len="med"/>
-                    </a:lnL>
-                    <a:lnR w="9525" cap="flat" cmpd="sng" algn="ctr">
-                      <a:solidFill>
-                        <a:srgbClr val="D8DEEC"/>
-                      </a:solidFill>
-                      <a:prstDash val="solid"/>
-                      <a:round/>
-                      <a:headEnd type="none" w="med" len="med"/>
-                      <a:tailEnd type="none" w="med" len="med"/>
-                    </a:lnR>
-                    <a:lnT w="9525" cap="flat" cmpd="sng" algn="ctr">
-                      <a:solidFill>
-                        <a:srgbClr val="D8DEEC"/>
-                      </a:solidFill>
-                      <a:prstDash val="solid"/>
-                      <a:round/>
-                      <a:headEnd type="none" w="med" len="med"/>
-                      <a:tailEnd type="none" w="med" len="med"/>
-                    </a:lnT>
-                    <a:lnB w="9525" cap="flat" cmpd="sng" algn="ctr">
-                      <a:solidFill>
-                        <a:srgbClr val="D8DEEC"/>
-                      </a:solidFill>
-                      <a:prstDash val="solid"/>
-                      <a:round/>
-                      <a:headEnd type="none" w="med" len="med"/>
-                      <a:tailEnd type="none" w="med" len="med"/>
-                    </a:lnB>
-                    <a:solidFill>
-                      <a:srgbClr val="FFFFFF"/>
-                    </a:solidFill>
-                  </a:tcPr>
-                </a:tc>
-              </a:tr>
-              <a:tr h="306324">
-                <a:tc>
-                  <a:txBody>
-                    <a:bodyPr/>
-                    <a:lstStyle/>
-                    <a:p>
-                      <a:pPr algn="l" indent="0" marL="0">
-                        <a:buNone/>
-                      </a:pPr>
-                      <a:r>
-                        <a:rPr lang="en-US" sz="1100" dirty="0">
-                          <a:solidFill>
-                            <a:srgbClr val="475569"/>
-                          </a:solidFill>
-                          <a:latin typeface="Calibri" pitchFamily="34" charset="0"/>
-                          <a:ea typeface="Calibri" pitchFamily="34" charset="-122"/>
-                          <a:cs typeface="Calibri" pitchFamily="34" charset="-120"/>
-                        </a:rPr>
-                        <a:t>Flowform Hücresi</a:t>
-                      </a:r>
-                      <a:endParaRPr lang="en-US" sz="1100" dirty="0">
-                        <a:latin typeface="Calibri" charset="0"/>
-                        <a:ea typeface="Calibri" charset="0"/>
-                        <a:cs typeface="Calibri" charset="0"/>
-                      </a:endParaRPr>
-                    </a:p>
-                  </a:txBody>
-                  <a:tcPr marL="91440" marR="91440" marT="45720" marB="45720" anchor="ctr">
-                    <a:lnL w="9525" cap="flat" cmpd="sng" algn="ctr">
-                      <a:solidFill>
-                        <a:srgbClr val="D8DEEC"/>
-                      </a:solidFill>
-                      <a:prstDash val="solid"/>
-                      <a:round/>
-                      <a:headEnd type="none" w="med" len="med"/>
-                      <a:tailEnd type="none" w="med" len="med"/>
-                    </a:lnL>
-                    <a:lnR w="9525" cap="flat" cmpd="sng" algn="ctr">
-                      <a:solidFill>
-                        <a:srgbClr val="D8DEEC"/>
-                      </a:solidFill>
-                      <a:prstDash val="solid"/>
-                      <a:round/>
-                      <a:headEnd type="none" w="med" len="med"/>
-                      <a:tailEnd type="none" w="med" len="med"/>
-                    </a:lnR>
-                    <a:lnT w="9525" cap="flat" cmpd="sng" algn="ctr">
-                      <a:solidFill>
-                        <a:srgbClr val="D8DEEC"/>
-                      </a:solidFill>
-                      <a:prstDash val="solid"/>
-                      <a:round/>
-                      <a:headEnd type="none" w="med" len="med"/>
-                      <a:tailEnd type="none" w="med" len="med"/>
-                    </a:lnT>
-                    <a:lnB w="9525" cap="flat" cmpd="sng" algn="ctr">
-                      <a:solidFill>
-                        <a:srgbClr val="D8DEEC"/>
-                      </a:solidFill>
-                      <a:prstDash val="solid"/>
-                      <a:round/>
-                      <a:headEnd type="none" w="med" len="med"/>
-                      <a:tailEnd type="none" w="med" len="med"/>
-                    </a:lnB>
-                    <a:solidFill>
-                      <a:srgbClr val="EEF2FC"/>
-                    </a:solidFill>
-                  </a:tcPr>
-                </a:tc>
-                <a:tc>
-                  <a:txBody>
-                    <a:bodyPr/>
-                    <a:lstStyle/>
-                    <a:p>
-                      <a:pPr algn="ctr" indent="0" marL="0">
-                        <a:buNone/>
-                      </a:pPr>
-                      <a:r>
-                        <a:rPr lang="en-US" sz="1100" dirty="0">
-                          <a:solidFill>
-                            <a:srgbClr val="475569"/>
-                          </a:solidFill>
-                          <a:latin typeface="Calibri" pitchFamily="34" charset="0"/>
-                          <a:ea typeface="Calibri" pitchFamily="34" charset="-122"/>
-                          <a:cs typeface="Calibri" pitchFamily="34" charset="-120"/>
-                        </a:rPr>
-                        <a:t>45.7</a:t>
-                      </a:r>
-                      <a:endParaRPr lang="en-US" sz="1100" dirty="0">
-                        <a:latin typeface="Calibri" charset="0"/>
-                        <a:ea typeface="Calibri" charset="0"/>
-                        <a:cs typeface="Calibri" charset="0"/>
-                      </a:endParaRPr>
-                    </a:p>
-                  </a:txBody>
-                  <a:tcPr marL="91440" marR="91440" marT="45720" marB="45720" anchor="ctr">
-                    <a:lnL w="9525" cap="flat" cmpd="sng" algn="ctr">
-                      <a:solidFill>
-                        <a:srgbClr val="D8DEEC"/>
-                      </a:solidFill>
-                      <a:prstDash val="solid"/>
-                      <a:round/>
-                      <a:headEnd type="none" w="med" len="med"/>
-                      <a:tailEnd type="none" w="med" len="med"/>
-                    </a:lnL>
-                    <a:lnR w="9525" cap="flat" cmpd="sng" algn="ctr">
-                      <a:solidFill>
-                        <a:srgbClr val="D8DEEC"/>
-                      </a:solidFill>
-                      <a:prstDash val="solid"/>
-                      <a:round/>
-                      <a:headEnd type="none" w="med" len="med"/>
-                      <a:tailEnd type="none" w="med" len="med"/>
-                    </a:lnR>
-                    <a:lnT w="9525" cap="flat" cmpd="sng" algn="ctr">
-                      <a:solidFill>
-                        <a:srgbClr val="D8DEEC"/>
-                      </a:solidFill>
-                      <a:prstDash val="solid"/>
-                      <a:round/>
-                      <a:headEnd type="none" w="med" len="med"/>
-                      <a:tailEnd type="none" w="med" len="med"/>
-                    </a:lnT>
-                    <a:lnB w="9525" cap="flat" cmpd="sng" algn="ctr">
-                      <a:solidFill>
-                        <a:srgbClr val="D8DEEC"/>
-                      </a:solidFill>
-                      <a:prstDash val="solid"/>
-                      <a:round/>
-                      <a:headEnd type="none" w="med" len="med"/>
-                      <a:tailEnd type="none" w="med" len="med"/>
-                    </a:lnB>
-                    <a:solidFill>
-                      <a:srgbClr val="EEF2FC"/>
-                    </a:solidFill>
-                  </a:tcPr>
-                </a:tc>
-                <a:tc>
-                  <a:txBody>
-                    <a:bodyPr/>
-                    <a:lstStyle/>
-                    <a:p>
-                      <a:pPr algn="ctr" indent="0" marL="0">
-                        <a:buNone/>
-                      </a:pPr>
-                      <a:r>
-                        <a:rPr lang="en-US" sz="1100" dirty="0">
-                          <a:solidFill>
-                            <a:srgbClr val="475569"/>
-                          </a:solidFill>
-                          <a:latin typeface="Calibri" pitchFamily="34" charset="0"/>
-                          <a:ea typeface="Calibri" pitchFamily="34" charset="-122"/>
-                          <a:cs typeface="Calibri" pitchFamily="34" charset="-120"/>
-                        </a:rPr>
-                        <a:t>109.8</a:t>
-                      </a:r>
-                      <a:endParaRPr lang="en-US" sz="1100" dirty="0">
-                        <a:latin typeface="Calibri" charset="0"/>
-                        <a:ea typeface="Calibri" charset="0"/>
-                        <a:cs typeface="Calibri" charset="0"/>
-                      </a:endParaRPr>
-                    </a:p>
-                  </a:txBody>
-                  <a:tcPr marL="91440" marR="91440" marT="45720" marB="45720" anchor="ctr">
-                    <a:lnL w="9525" cap="flat" cmpd="sng" algn="ctr">
-                      <a:solidFill>
-                        <a:srgbClr val="D8DEEC"/>
-                      </a:solidFill>
-                      <a:prstDash val="solid"/>
-                      <a:round/>
-                      <a:headEnd type="none" w="med" len="med"/>
-                      <a:tailEnd type="none" w="med" len="med"/>
-                    </a:lnL>
-                    <a:lnR w="9525" cap="flat" cmpd="sng" algn="ctr">
-                      <a:solidFill>
-                        <a:srgbClr val="D8DEEC"/>
-                      </a:solidFill>
-                      <a:prstDash val="solid"/>
-                      <a:round/>
-                      <a:headEnd type="none" w="med" len="med"/>
-                      <a:tailEnd type="none" w="med" len="med"/>
-                    </a:lnR>
-                    <a:lnT w="9525" cap="flat" cmpd="sng" algn="ctr">
-                      <a:solidFill>
-                        <a:srgbClr val="D8DEEC"/>
-                      </a:solidFill>
-                      <a:prstDash val="solid"/>
-                      <a:round/>
-                      <a:headEnd type="none" w="med" len="med"/>
-                      <a:tailEnd type="none" w="med" len="med"/>
-                    </a:lnT>
-                    <a:lnB w="9525" cap="flat" cmpd="sng" algn="ctr">
-                      <a:solidFill>
-                        <a:srgbClr val="D8DEEC"/>
-                      </a:solidFill>
-                      <a:prstDash val="solid"/>
-                      <a:round/>
-                      <a:headEnd type="none" w="med" len="med"/>
-                      <a:tailEnd type="none" w="med" len="med"/>
-                    </a:lnB>
-                    <a:solidFill>
-                      <a:srgbClr val="EEF2FC"/>
-                    </a:solidFill>
-                  </a:tcPr>
-                </a:tc>
-                <a:tc>
-                  <a:txBody>
-                    <a:bodyPr/>
-                    <a:lstStyle/>
-                    <a:p>
-                      <a:pPr algn="ctr" indent="0" marL="0">
-                        <a:buNone/>
-                      </a:pPr>
-                      <a:r>
-                        <a:rPr lang="en-US" sz="1100" b="1" dirty="0">
-                          <a:solidFill>
-                            <a:srgbClr val="15803D"/>
-                          </a:solidFill>
-                          <a:latin typeface="Calibri" pitchFamily="34" charset="0"/>
-                          <a:ea typeface="Calibri" pitchFamily="34" charset="-122"/>
-                          <a:cs typeface="Calibri" pitchFamily="34" charset="-120"/>
-                        </a:rPr>
-                        <a:t>+140%</a:t>
-                      </a:r>
-                      <a:endParaRPr lang="en-US" sz="1100" dirty="0">
-                        <a:latin typeface="Calibri" charset="0"/>
-                        <a:ea typeface="Calibri" charset="0"/>
-                        <a:cs typeface="Calibri" charset="0"/>
-                      </a:endParaRPr>
-                    </a:p>
-                  </a:txBody>
-                  <a:tcPr marL="91440" marR="91440" marT="45720" marB="45720" anchor="ctr">
-                    <a:lnL w="9525" cap="flat" cmpd="sng" algn="ctr">
-                      <a:solidFill>
-                        <a:srgbClr val="D8DEEC"/>
-                      </a:solidFill>
-                      <a:prstDash val="solid"/>
-                      <a:round/>
-                      <a:headEnd type="none" w="med" len="med"/>
-                      <a:tailEnd type="none" w="med" len="med"/>
-                    </a:lnL>
-                    <a:lnR w="9525" cap="flat" cmpd="sng" algn="ctr">
-                      <a:solidFill>
-                        <a:srgbClr val="D8DEEC"/>
-                      </a:solidFill>
-                      <a:prstDash val="solid"/>
-                      <a:round/>
-                      <a:headEnd type="none" w="med" len="med"/>
-                      <a:tailEnd type="none" w="med" len="med"/>
-                    </a:lnR>
-                    <a:lnT w="9525" cap="flat" cmpd="sng" algn="ctr">
-                      <a:solidFill>
-                        <a:srgbClr val="D8DEEC"/>
-                      </a:solidFill>
-                      <a:prstDash val="solid"/>
-                      <a:round/>
-                      <a:headEnd type="none" w="med" len="med"/>
-                      <a:tailEnd type="none" w="med" len="med"/>
-                    </a:lnT>
-                    <a:lnB w="9525" cap="flat" cmpd="sng" algn="ctr">
-                      <a:solidFill>
-                        <a:srgbClr val="D8DEEC"/>
-                      </a:solidFill>
-                      <a:prstDash val="solid"/>
-                      <a:round/>
-                      <a:headEnd type="none" w="med" len="med"/>
-                      <a:tailEnd type="none" w="med" len="med"/>
-                    </a:lnB>
-                    <a:solidFill>
-                      <a:srgbClr val="EEF2FC"/>
-                    </a:solidFill>
-                  </a:tcPr>
-                </a:tc>
-              </a:tr>
-              <a:tr h="306324">
-                <a:tc>
-                  <a:txBody>
-                    <a:bodyPr/>
-                    <a:lstStyle/>
-                    <a:p>
-                      <a:pPr algn="l" indent="0" marL="0">
-                        <a:buNone/>
-                      </a:pPr>
-                      <a:r>
-                        <a:rPr lang="en-US" sz="1100" dirty="0">
-                          <a:solidFill>
-                            <a:srgbClr val="475569"/>
-                          </a:solidFill>
-                          <a:latin typeface="Calibri" pitchFamily="34" charset="0"/>
-                          <a:ea typeface="Calibri" pitchFamily="34" charset="-122"/>
-                          <a:cs typeface="Calibri" pitchFamily="34" charset="-120"/>
-                        </a:rPr>
-                        <a:t>ROB104 Hücresi</a:t>
-                      </a:r>
-                      <a:endParaRPr lang="en-US" sz="1100" dirty="0">
-                        <a:latin typeface="Calibri" charset="0"/>
-                        <a:ea typeface="Calibri" charset="0"/>
-                        <a:cs typeface="Calibri" charset="0"/>
-                      </a:endParaRPr>
-                    </a:p>
-                  </a:txBody>
-                  <a:tcPr marL="91440" marR="91440" marT="45720" marB="45720" anchor="ctr">
-                    <a:lnL w="9525" cap="flat" cmpd="sng" algn="ctr">
-                      <a:solidFill>
-                        <a:srgbClr val="D8DEEC"/>
-                      </a:solidFill>
-                      <a:prstDash val="solid"/>
-                      <a:round/>
-                      <a:headEnd type="none" w="med" len="med"/>
-                      <a:tailEnd type="none" w="med" len="med"/>
-                    </a:lnL>
-                    <a:lnR w="9525" cap="flat" cmpd="sng" algn="ctr">
-                      <a:solidFill>
-                        <a:srgbClr val="D8DEEC"/>
-                      </a:solidFill>
-                      <a:prstDash val="solid"/>
-                      <a:round/>
-                      <a:headEnd type="none" w="med" len="med"/>
-                      <a:tailEnd type="none" w="med" len="med"/>
-                    </a:lnR>
-                    <a:lnT w="9525" cap="flat" cmpd="sng" algn="ctr">
-                      <a:solidFill>
-                        <a:srgbClr val="D8DEEC"/>
-                      </a:solidFill>
-                      <a:prstDash val="solid"/>
-                      <a:round/>
-                      <a:headEnd type="none" w="med" len="med"/>
-                      <a:tailEnd type="none" w="med" len="med"/>
-                    </a:lnT>
-                    <a:lnB w="9525" cap="flat" cmpd="sng" algn="ctr">
-                      <a:solidFill>
-                        <a:srgbClr val="D8DEEC"/>
-                      </a:solidFill>
-                      <a:prstDash val="solid"/>
-                      <a:round/>
-                      <a:headEnd type="none" w="med" len="med"/>
-                      <a:tailEnd type="none" w="med" len="med"/>
-                    </a:lnB>
-                    <a:solidFill>
-                      <a:srgbClr val="FFFFFF"/>
-                    </a:solidFill>
-                  </a:tcPr>
-                </a:tc>
-                <a:tc>
-                  <a:txBody>
-                    <a:bodyPr/>
-                    <a:lstStyle/>
-                    <a:p>
-                      <a:pPr algn="ctr" indent="0" marL="0">
-                        <a:buNone/>
-                      </a:pPr>
-                      <a:r>
-                        <a:rPr lang="en-US" sz="1100" dirty="0">
-                          <a:solidFill>
-                            <a:srgbClr val="475569"/>
-                          </a:solidFill>
-                          <a:latin typeface="Calibri" pitchFamily="34" charset="0"/>
-                          <a:ea typeface="Calibri" pitchFamily="34" charset="-122"/>
-                          <a:cs typeface="Calibri" pitchFamily="34" charset="-120"/>
-                        </a:rPr>
-                        <a:t>43.9</a:t>
-                      </a:r>
-                      <a:endParaRPr lang="en-US" sz="1100" dirty="0">
-                        <a:latin typeface="Calibri" charset="0"/>
-                        <a:ea typeface="Calibri" charset="0"/>
-                        <a:cs typeface="Calibri" charset="0"/>
-                      </a:endParaRPr>
-                    </a:p>
-                  </a:txBody>
-                  <a:tcPr marL="91440" marR="91440" marT="45720" marB="45720" anchor="ctr">
-                    <a:lnL w="9525" cap="flat" cmpd="sng" algn="ctr">
-                      <a:solidFill>
-                        <a:srgbClr val="D8DEEC"/>
-                      </a:solidFill>
-                      <a:prstDash val="solid"/>
-                      <a:round/>
-                      <a:headEnd type="none" w="med" len="med"/>
-                      <a:tailEnd type="none" w="med" len="med"/>
-                    </a:lnL>
-                    <a:lnR w="9525" cap="flat" cmpd="sng" algn="ctr">
-                      <a:solidFill>
-                        <a:srgbClr val="D8DEEC"/>
-                      </a:solidFill>
-                      <a:prstDash val="solid"/>
-                      <a:round/>
-                      <a:headEnd type="none" w="med" len="med"/>
-                      <a:tailEnd type="none" w="med" len="med"/>
-                    </a:lnR>
-                    <a:lnT w="9525" cap="flat" cmpd="sng" algn="ctr">
-                      <a:solidFill>
-                        <a:srgbClr val="D8DEEC"/>
-                      </a:solidFill>
-                      <a:prstDash val="solid"/>
-                      <a:round/>
-                      <a:headEnd type="none" w="med" len="med"/>
-                      <a:tailEnd type="none" w="med" len="med"/>
-                    </a:lnT>
-                    <a:lnB w="9525" cap="flat" cmpd="sng" algn="ctr">
-                      <a:solidFill>
-                        <a:srgbClr val="D8DEEC"/>
-                      </a:solidFill>
-                      <a:prstDash val="solid"/>
-                      <a:round/>
-                      <a:headEnd type="none" w="med" len="med"/>
-                      <a:tailEnd type="none" w="med" len="med"/>
-                    </a:lnB>
-                    <a:solidFill>
-                      <a:srgbClr val="FFFFFF"/>
-                    </a:solidFill>
-                  </a:tcPr>
-                </a:tc>
-                <a:tc>
-                  <a:txBody>
-                    <a:bodyPr/>
-                    <a:lstStyle/>
-                    <a:p>
-                      <a:pPr algn="ctr" indent="0" marL="0">
-                        <a:buNone/>
-                      </a:pPr>
-                      <a:r>
-                        <a:rPr lang="en-US" sz="1100" dirty="0">
-                          <a:solidFill>
-                            <a:srgbClr val="475569"/>
-                          </a:solidFill>
-                          <a:latin typeface="Calibri" pitchFamily="34" charset="0"/>
-                          <a:ea typeface="Calibri" pitchFamily="34" charset="-122"/>
-                          <a:cs typeface="Calibri" pitchFamily="34" charset="-120"/>
-                        </a:rPr>
-                        <a:t>106.0</a:t>
-                      </a:r>
-                      <a:endParaRPr lang="en-US" sz="1100" dirty="0">
-                        <a:latin typeface="Calibri" charset="0"/>
-                        <a:ea typeface="Calibri" charset="0"/>
-                        <a:cs typeface="Calibri" charset="0"/>
-                      </a:endParaRPr>
-                    </a:p>
-                  </a:txBody>
-                  <a:tcPr marL="91440" marR="91440" marT="45720" marB="45720" anchor="ctr">
-                    <a:lnL w="9525" cap="flat" cmpd="sng" algn="ctr">
-                      <a:solidFill>
-                        <a:srgbClr val="D8DEEC"/>
-                      </a:solidFill>
-                      <a:prstDash val="solid"/>
-                      <a:round/>
-                      <a:headEnd type="none" w="med" len="med"/>
-                      <a:tailEnd type="none" w="med" len="med"/>
-                    </a:lnL>
-                    <a:lnR w="9525" cap="flat" cmpd="sng" algn="ctr">
-                      <a:solidFill>
-                        <a:srgbClr val="D8DEEC"/>
-                      </a:solidFill>
-                      <a:prstDash val="solid"/>
-                      <a:round/>
-                      <a:headEnd type="none" w="med" len="med"/>
-                      <a:tailEnd type="none" w="med" len="med"/>
-                    </a:lnR>
-                    <a:lnT w="9525" cap="flat" cmpd="sng" algn="ctr">
-                      <a:solidFill>
-                        <a:srgbClr val="D8DEEC"/>
-                      </a:solidFill>
-                      <a:prstDash val="solid"/>
-                      <a:round/>
-                      <a:headEnd type="none" w="med" len="med"/>
-                      <a:tailEnd type="none" w="med" len="med"/>
-                    </a:lnT>
-                    <a:lnB w="9525" cap="flat" cmpd="sng" algn="ctr">
-                      <a:solidFill>
-                        <a:srgbClr val="D8DEEC"/>
-                      </a:solidFill>
-                      <a:prstDash val="solid"/>
-                      <a:round/>
-                      <a:headEnd type="none" w="med" len="med"/>
-                      <a:tailEnd type="none" w="med" len="med"/>
-                    </a:lnB>
-                    <a:solidFill>
-                      <a:srgbClr val="FFFFFF"/>
-                    </a:solidFill>
-                  </a:tcPr>
-                </a:tc>
-                <a:tc>
-                  <a:txBody>
-                    <a:bodyPr/>
-                    <a:lstStyle/>
-                    <a:p>
-                      <a:pPr algn="ctr" indent="0" marL="0">
-                        <a:buNone/>
-                      </a:pPr>
-                      <a:r>
-                        <a:rPr lang="en-US" sz="1100" b="1" dirty="0">
-                          <a:solidFill>
-                            <a:srgbClr val="15803D"/>
-                          </a:solidFill>
-                          <a:latin typeface="Calibri" pitchFamily="34" charset="0"/>
-                          <a:ea typeface="Calibri" pitchFamily="34" charset="-122"/>
-                          <a:cs typeface="Calibri" pitchFamily="34" charset="-120"/>
-                        </a:rPr>
-                        <a:t>+141%</a:t>
-                      </a:r>
-                      <a:endParaRPr lang="en-US" sz="1100" dirty="0">
-                        <a:latin typeface="Calibri" charset="0"/>
-                        <a:ea typeface="Calibri" charset="0"/>
-                        <a:cs typeface="Calibri" charset="0"/>
-                      </a:endParaRPr>
-                    </a:p>
-                  </a:txBody>
-                  <a:tcPr marL="91440" marR="91440" marT="45720" marB="45720" anchor="ctr">
-                    <a:lnL w="9525" cap="flat" cmpd="sng" algn="ctr">
-                      <a:solidFill>
-                        <a:srgbClr val="D8DEEC"/>
-                      </a:solidFill>
-                      <a:prstDash val="solid"/>
-                      <a:round/>
-                      <a:headEnd type="none" w="med" len="med"/>
-                      <a:tailEnd type="none" w="med" len="med"/>
-                    </a:lnL>
-                    <a:lnR w="9525" cap="flat" cmpd="sng" algn="ctr">
-                      <a:solidFill>
-                        <a:srgbClr val="D8DEEC"/>
-                      </a:solidFill>
-                      <a:prstDash val="solid"/>
-                      <a:round/>
-                      <a:headEnd type="none" w="med" len="med"/>
-                      <a:tailEnd type="none" w="med" len="med"/>
-                    </a:lnR>
-                    <a:lnT w="9525" cap="flat" cmpd="sng" algn="ctr">
-                      <a:solidFill>
-                        <a:srgbClr val="D8DEEC"/>
-                      </a:solidFill>
-                      <a:prstDash val="solid"/>
-                      <a:round/>
-                      <a:headEnd type="none" w="med" len="med"/>
-                      <a:tailEnd type="none" w="med" len="med"/>
-                    </a:lnT>
-                    <a:lnB w="9525" cap="flat" cmpd="sng" algn="ctr">
-                      <a:solidFill>
-                        <a:srgbClr val="D8DEEC"/>
-                      </a:solidFill>
-                      <a:prstDash val="solid"/>
-                      <a:round/>
-                      <a:headEnd type="none" w="med" len="med"/>
-                      <a:tailEnd type="none" w="med" len="med"/>
-                    </a:lnB>
-                    <a:solidFill>
-                      <a:srgbClr val="FFFFFF"/>
-                    </a:solidFill>
-                  </a:tcPr>
-                </a:tc>
-              </a:tr>
-              <a:tr h="306324">
-                <a:tc>
-                  <a:txBody>
-                    <a:bodyPr/>
-                    <a:lstStyle/>
-                    <a:p>
-                      <a:pPr algn="l" indent="0" marL="0">
-                        <a:buNone/>
-                      </a:pPr>
-                      <a:r>
-                        <a:rPr lang="en-US" sz="1100" dirty="0">
-                          <a:solidFill>
-                            <a:srgbClr val="475569"/>
-                          </a:solidFill>
-                          <a:latin typeface="Calibri" pitchFamily="34" charset="0"/>
-                          <a:ea typeface="Calibri" pitchFamily="34" charset="-122"/>
-                          <a:cs typeface="Calibri" pitchFamily="34" charset="-120"/>
-                        </a:rPr>
-                        <a:t>N602-N603 Hücresi</a:t>
-                      </a:r>
-                      <a:endParaRPr lang="en-US" sz="1100" dirty="0">
-                        <a:latin typeface="Calibri" charset="0"/>
-                        <a:ea typeface="Calibri" charset="0"/>
-                        <a:cs typeface="Calibri" charset="0"/>
-                      </a:endParaRPr>
-                    </a:p>
-                  </a:txBody>
-                  <a:tcPr marL="91440" marR="91440" marT="45720" marB="45720" anchor="ctr">
-                    <a:lnL w="9525" cap="flat" cmpd="sng" algn="ctr">
-                      <a:solidFill>
-                        <a:srgbClr val="D8DEEC"/>
-                      </a:solidFill>
-                      <a:prstDash val="solid"/>
-                      <a:round/>
-                      <a:headEnd type="none" w="med" len="med"/>
-                      <a:tailEnd type="none" w="med" len="med"/>
-                    </a:lnL>
-                    <a:lnR w="9525" cap="flat" cmpd="sng" algn="ctr">
-                      <a:solidFill>
-                        <a:srgbClr val="D8DEEC"/>
-                      </a:solidFill>
-                      <a:prstDash val="solid"/>
-                      <a:round/>
-                      <a:headEnd type="none" w="med" len="med"/>
-                      <a:tailEnd type="none" w="med" len="med"/>
-                    </a:lnR>
-                    <a:lnT w="9525" cap="flat" cmpd="sng" algn="ctr">
-                      <a:solidFill>
-                        <a:srgbClr val="D8DEEC"/>
-                      </a:solidFill>
-                      <a:prstDash val="solid"/>
-                      <a:round/>
-                      <a:headEnd type="none" w="med" len="med"/>
-                      <a:tailEnd type="none" w="med" len="med"/>
-                    </a:lnT>
-                    <a:lnB w="9525" cap="flat" cmpd="sng" algn="ctr">
-                      <a:solidFill>
-                        <a:srgbClr val="D8DEEC"/>
-                      </a:solidFill>
-                      <a:prstDash val="solid"/>
-                      <a:round/>
-                      <a:headEnd type="none" w="med" len="med"/>
-                      <a:tailEnd type="none" w="med" len="med"/>
-                    </a:lnB>
-                    <a:solidFill>
-                      <a:srgbClr val="EEF2FC"/>
-                    </a:solidFill>
-                  </a:tcPr>
-                </a:tc>
-                <a:tc>
-                  <a:txBody>
-                    <a:bodyPr/>
-                    <a:lstStyle/>
-                    <a:p>
-                      <a:pPr algn="ctr" indent="0" marL="0">
-                        <a:buNone/>
-                      </a:pPr>
-                      <a:r>
-                        <a:rPr lang="en-US" sz="1100" dirty="0">
-                          <a:solidFill>
-                            <a:srgbClr val="475569"/>
-                          </a:solidFill>
-                          <a:latin typeface="Calibri" pitchFamily="34" charset="0"/>
-                          <a:ea typeface="Calibri" pitchFamily="34" charset="-122"/>
-                          <a:cs typeface="Calibri" pitchFamily="34" charset="-120"/>
-                        </a:rPr>
-                        <a:t>42.4</a:t>
-                      </a:r>
-                      <a:endParaRPr lang="en-US" sz="1100" dirty="0">
-                        <a:latin typeface="Calibri" charset="0"/>
-                        <a:ea typeface="Calibri" charset="0"/>
-                        <a:cs typeface="Calibri" charset="0"/>
-                      </a:endParaRPr>
-                    </a:p>
-                  </a:txBody>
-                  <a:tcPr marL="91440" marR="91440" marT="45720" marB="45720" anchor="ctr">
-                    <a:lnL w="9525" cap="flat" cmpd="sng" algn="ctr">
-                      <a:solidFill>
-                        <a:srgbClr val="D8DEEC"/>
-                      </a:solidFill>
-                      <a:prstDash val="solid"/>
-                      <a:round/>
-                      <a:headEnd type="none" w="med" len="med"/>
-                      <a:tailEnd type="none" w="med" len="med"/>
-                    </a:lnL>
-                    <a:lnR w="9525" cap="flat" cmpd="sng" algn="ctr">
-                      <a:solidFill>
-                        <a:srgbClr val="D8DEEC"/>
-                      </a:solidFill>
-                      <a:prstDash val="solid"/>
-                      <a:round/>
-                      <a:headEnd type="none" w="med" len="med"/>
-                      <a:tailEnd type="none" w="med" len="med"/>
-                    </a:lnR>
-                    <a:lnT w="9525" cap="flat" cmpd="sng" algn="ctr">
-                      <a:solidFill>
-                        <a:srgbClr val="D8DEEC"/>
-                      </a:solidFill>
-                      <a:prstDash val="solid"/>
-                      <a:round/>
-                      <a:headEnd type="none" w="med" len="med"/>
-                      <a:tailEnd type="none" w="med" len="med"/>
-                    </a:lnT>
-                    <a:lnB w="9525" cap="flat" cmpd="sng" algn="ctr">
-                      <a:solidFill>
-                        <a:srgbClr val="D8DEEC"/>
-                      </a:solidFill>
-                      <a:prstDash val="solid"/>
-                      <a:round/>
-                      <a:headEnd type="none" w="med" len="med"/>
-                      <a:tailEnd type="none" w="med" len="med"/>
-                    </a:lnB>
-                    <a:solidFill>
-                      <a:srgbClr val="EEF2FC"/>
-                    </a:solidFill>
-                  </a:tcPr>
-                </a:tc>
-                <a:tc>
-                  <a:txBody>
-                    <a:bodyPr/>
-                    <a:lstStyle/>
-                    <a:p>
-                      <a:pPr algn="ctr" indent="0" marL="0">
-                        <a:buNone/>
-                      </a:pPr>
-                      <a:r>
-                        <a:rPr lang="en-US" sz="1100" dirty="0">
-                          <a:solidFill>
-                            <a:srgbClr val="475569"/>
-                          </a:solidFill>
-                          <a:latin typeface="Calibri" pitchFamily="34" charset="0"/>
-                          <a:ea typeface="Calibri" pitchFamily="34" charset="-122"/>
-                          <a:cs typeface="Calibri" pitchFamily="34" charset="-120"/>
-                        </a:rPr>
-                        <a:t>95.6</a:t>
-                      </a:r>
-                      <a:endParaRPr lang="en-US" sz="1100" dirty="0">
-                        <a:latin typeface="Calibri" charset="0"/>
-                        <a:ea typeface="Calibri" charset="0"/>
-                        <a:cs typeface="Calibri" charset="0"/>
-                      </a:endParaRPr>
-                    </a:p>
-                  </a:txBody>
-                  <a:tcPr marL="91440" marR="91440" marT="45720" marB="45720" anchor="ctr">
-                    <a:lnL w="9525" cap="flat" cmpd="sng" algn="ctr">
-                      <a:solidFill>
-                        <a:srgbClr val="D8DEEC"/>
-                      </a:solidFill>
-                      <a:prstDash val="solid"/>
-                      <a:round/>
-                      <a:headEnd type="none" w="med" len="med"/>
-                      <a:tailEnd type="none" w="med" len="med"/>
-                    </a:lnL>
-                    <a:lnR w="9525" cap="flat" cmpd="sng" algn="ctr">
-                      <a:solidFill>
-                        <a:srgbClr val="D8DEEC"/>
-                      </a:solidFill>
-                      <a:prstDash val="solid"/>
-                      <a:round/>
-                      <a:headEnd type="none" w="med" len="med"/>
-                      <a:tailEnd type="none" w="med" len="med"/>
-                    </a:lnR>
-                    <a:lnT w="9525" cap="flat" cmpd="sng" algn="ctr">
-                      <a:solidFill>
-                        <a:srgbClr val="D8DEEC"/>
-                      </a:solidFill>
-                      <a:prstDash val="solid"/>
-                      <a:round/>
-                      <a:headEnd type="none" w="med" len="med"/>
-                      <a:tailEnd type="none" w="med" len="med"/>
-                    </a:lnT>
-                    <a:lnB w="9525" cap="flat" cmpd="sng" algn="ctr">
-                      <a:solidFill>
-                        <a:srgbClr val="D8DEEC"/>
-                      </a:solidFill>
-                      <a:prstDash val="solid"/>
-                      <a:round/>
-                      <a:headEnd type="none" w="med" len="med"/>
-                      <a:tailEnd type="none" w="med" len="med"/>
-                    </a:lnB>
-                    <a:solidFill>
-                      <a:srgbClr val="EEF2FC"/>
-                    </a:solidFill>
-                  </a:tcPr>
-                </a:tc>
-                <a:tc>
-                  <a:txBody>
-                    <a:bodyPr/>
-                    <a:lstStyle/>
-                    <a:p>
-                      <a:pPr algn="ctr" indent="0" marL="0">
-                        <a:buNone/>
-                      </a:pPr>
-                      <a:r>
-                        <a:rPr lang="en-US" sz="1100" b="1" dirty="0">
-                          <a:solidFill>
-                            <a:srgbClr val="15803D"/>
-                          </a:solidFill>
-                          <a:latin typeface="Calibri" pitchFamily="34" charset="0"/>
-                          <a:ea typeface="Calibri" pitchFamily="34" charset="-122"/>
-                          <a:cs typeface="Calibri" pitchFamily="34" charset="-120"/>
-                        </a:rPr>
-                        <a:t>+125%</a:t>
-                      </a:r>
-                      <a:endParaRPr lang="en-US" sz="1100" dirty="0">
-                        <a:latin typeface="Calibri" charset="0"/>
-                        <a:ea typeface="Calibri" charset="0"/>
-                        <a:cs typeface="Calibri" charset="0"/>
-                      </a:endParaRPr>
-                    </a:p>
-                  </a:txBody>
-                  <a:tcPr marL="91440" marR="91440" marT="45720" marB="45720" anchor="ctr">
-                    <a:lnL w="9525" cap="flat" cmpd="sng" algn="ctr">
-                      <a:solidFill>
-                        <a:srgbClr val="D8DEEC"/>
-                      </a:solidFill>
-                      <a:prstDash val="solid"/>
-                      <a:round/>
-                      <a:headEnd type="none" w="med" len="med"/>
-                      <a:tailEnd type="none" w="med" len="med"/>
-                    </a:lnL>
-                    <a:lnR w="9525" cap="flat" cmpd="sng" algn="ctr">
-                      <a:solidFill>
-                        <a:srgbClr val="D8DEEC"/>
-                      </a:solidFill>
-                      <a:prstDash val="solid"/>
-                      <a:round/>
-                      <a:headEnd type="none" w="med" len="med"/>
-                      <a:tailEnd type="none" w="med" len="med"/>
-                    </a:lnR>
-                    <a:lnT w="9525" cap="flat" cmpd="sng" algn="ctr">
-                      <a:solidFill>
-                        <a:srgbClr val="D8DEEC"/>
-                      </a:solidFill>
-                      <a:prstDash val="solid"/>
-                      <a:round/>
-                      <a:headEnd type="none" w="med" len="med"/>
-                      <a:tailEnd type="none" w="med" len="med"/>
-                    </a:lnT>
-                    <a:lnB w="9525" cap="flat" cmpd="sng" algn="ctr">
-                      <a:solidFill>
-                        <a:srgbClr val="D8DEEC"/>
-                      </a:solidFill>
-                      <a:prstDash val="solid"/>
-                      <a:round/>
-                      <a:headEnd type="none" w="med" len="med"/>
-                      <a:tailEnd type="none" w="med" len="med"/>
-                    </a:lnB>
-                    <a:solidFill>
-                      <a:srgbClr val="EEF2FC"/>
-                    </a:solidFill>
-                  </a:tcPr>
-                </a:tc>
-              </a:tr>
-              <a:tr h="306324">
-                <a:tc>
-                  <a:txBody>
-                    <a:bodyPr/>
-                    <a:lstStyle/>
-                    <a:p>
-                      <a:pPr algn="l" indent="0" marL="0">
-                        <a:buNone/>
-                      </a:pPr>
-                      <a:r>
-                        <a:rPr lang="en-US" sz="1100" dirty="0">
-                          <a:solidFill>
-                            <a:srgbClr val="475569"/>
-                          </a:solidFill>
-                          <a:latin typeface="Calibri" pitchFamily="34" charset="0"/>
-                          <a:ea typeface="Calibri" pitchFamily="34" charset="-122"/>
-                          <a:cs typeface="Calibri" pitchFamily="34" charset="-120"/>
-                        </a:rPr>
-                        <a:t>ROB109 Hücresi</a:t>
-                      </a:r>
-                      <a:endParaRPr lang="en-US" sz="1100" dirty="0">
-                        <a:latin typeface="Calibri" charset="0"/>
-                        <a:ea typeface="Calibri" charset="0"/>
-                        <a:cs typeface="Calibri" charset="0"/>
-                      </a:endParaRPr>
-                    </a:p>
-                  </a:txBody>
-                  <a:tcPr marL="91440" marR="91440" marT="45720" marB="45720" anchor="ctr">
-                    <a:lnL w="9525" cap="flat" cmpd="sng" algn="ctr">
-                      <a:solidFill>
-                        <a:srgbClr val="D8DEEC"/>
-                      </a:solidFill>
-                      <a:prstDash val="solid"/>
-                      <a:round/>
-                      <a:headEnd type="none" w="med" len="med"/>
-                      <a:tailEnd type="none" w="med" len="med"/>
-                    </a:lnL>
-                    <a:lnR w="9525" cap="flat" cmpd="sng" algn="ctr">
-                      <a:solidFill>
-                        <a:srgbClr val="D8DEEC"/>
-                      </a:solidFill>
-                      <a:prstDash val="solid"/>
-                      <a:round/>
-                      <a:headEnd type="none" w="med" len="med"/>
-                      <a:tailEnd type="none" w="med" len="med"/>
-                    </a:lnR>
-                    <a:lnT w="9525" cap="flat" cmpd="sng" algn="ctr">
-                      <a:solidFill>
-                        <a:srgbClr val="D8DEEC"/>
-                      </a:solidFill>
-                      <a:prstDash val="solid"/>
-                      <a:round/>
-                      <a:headEnd type="none" w="med" len="med"/>
-                      <a:tailEnd type="none" w="med" len="med"/>
-                    </a:lnT>
-                    <a:lnB w="9525" cap="flat" cmpd="sng" algn="ctr">
-                      <a:solidFill>
-                        <a:srgbClr val="D8DEEC"/>
-                      </a:solidFill>
-                      <a:prstDash val="solid"/>
-                      <a:round/>
-                      <a:headEnd type="none" w="med" len="med"/>
-                      <a:tailEnd type="none" w="med" len="med"/>
-                    </a:lnB>
-                    <a:solidFill>
-                      <a:srgbClr val="FFFFFF"/>
-                    </a:solidFill>
-                  </a:tcPr>
-                </a:tc>
-                <a:tc>
-                  <a:txBody>
-                    <a:bodyPr/>
-                    <a:lstStyle/>
-                    <a:p>
-                      <a:pPr algn="ctr" indent="0" marL="0">
-                        <a:buNone/>
-                      </a:pPr>
-                      <a:r>
-                        <a:rPr lang="en-US" sz="1100" dirty="0">
-                          <a:solidFill>
-                            <a:srgbClr val="475569"/>
-                          </a:solidFill>
-                          <a:latin typeface="Calibri" pitchFamily="34" charset="0"/>
-                          <a:ea typeface="Calibri" pitchFamily="34" charset="-122"/>
-                          <a:cs typeface="Calibri" pitchFamily="34" charset="-120"/>
-                        </a:rPr>
-                        <a:t>38.9</a:t>
-                      </a:r>
-                      <a:endParaRPr lang="en-US" sz="1100" dirty="0">
-                        <a:latin typeface="Calibri" charset="0"/>
-                        <a:ea typeface="Calibri" charset="0"/>
-                        <a:cs typeface="Calibri" charset="0"/>
-                      </a:endParaRPr>
-                    </a:p>
-                  </a:txBody>
-                  <a:tcPr marL="91440" marR="91440" marT="45720" marB="45720" anchor="ctr">
-                    <a:lnL w="9525" cap="flat" cmpd="sng" algn="ctr">
-                      <a:solidFill>
-                        <a:srgbClr val="D8DEEC"/>
-                      </a:solidFill>
-                      <a:prstDash val="solid"/>
-                      <a:round/>
-                      <a:headEnd type="none" w="med" len="med"/>
-                      <a:tailEnd type="none" w="med" len="med"/>
-                    </a:lnL>
-                    <a:lnR w="9525" cap="flat" cmpd="sng" algn="ctr">
-                      <a:solidFill>
-                        <a:srgbClr val="D8DEEC"/>
-                      </a:solidFill>
-                      <a:prstDash val="solid"/>
-                      <a:round/>
-                      <a:headEnd type="none" w="med" len="med"/>
-                      <a:tailEnd type="none" w="med" len="med"/>
-                    </a:lnR>
-                    <a:lnT w="9525" cap="flat" cmpd="sng" algn="ctr">
-                      <a:solidFill>
-                        <a:srgbClr val="D8DEEC"/>
-                      </a:solidFill>
-                      <a:prstDash val="solid"/>
-                      <a:round/>
-                      <a:headEnd type="none" w="med" len="med"/>
-                      <a:tailEnd type="none" w="med" len="med"/>
-                    </a:lnT>
-                    <a:lnB w="9525" cap="flat" cmpd="sng" algn="ctr">
-                      <a:solidFill>
-                        <a:srgbClr val="D8DEEC"/>
-                      </a:solidFill>
-                      <a:prstDash val="solid"/>
-                      <a:round/>
-                      <a:headEnd type="none" w="med" len="med"/>
-                      <a:tailEnd type="none" w="med" len="med"/>
-                    </a:lnB>
-                    <a:solidFill>
-                      <a:srgbClr val="FFFFFF"/>
-                    </a:solidFill>
-                  </a:tcPr>
-                </a:tc>
-                <a:tc>
-                  <a:txBody>
-                    <a:bodyPr/>
-                    <a:lstStyle/>
-                    <a:p>
-                      <a:pPr algn="ctr" indent="0" marL="0">
-                        <a:buNone/>
-                      </a:pPr>
-                      <a:r>
-                        <a:rPr lang="en-US" sz="1100" dirty="0">
-                          <a:solidFill>
-                            <a:srgbClr val="475569"/>
-                          </a:solidFill>
-                          <a:latin typeface="Calibri" pitchFamily="34" charset="0"/>
-                          <a:ea typeface="Calibri" pitchFamily="34" charset="-122"/>
-                          <a:cs typeface="Calibri" pitchFamily="34" charset="-120"/>
-                        </a:rPr>
-                        <a:t>99.9</a:t>
-                      </a:r>
-                      <a:endParaRPr lang="en-US" sz="1100" dirty="0">
-                        <a:latin typeface="Calibri" charset="0"/>
-                        <a:ea typeface="Calibri" charset="0"/>
-                        <a:cs typeface="Calibri" charset="0"/>
-                      </a:endParaRPr>
-                    </a:p>
-                  </a:txBody>
-                  <a:tcPr marL="91440" marR="91440" marT="45720" marB="45720" anchor="ctr">
-                    <a:lnL w="9525" cap="flat" cmpd="sng" algn="ctr">
-                      <a:solidFill>
-                        <a:srgbClr val="D8DEEC"/>
-                      </a:solidFill>
-                      <a:prstDash val="solid"/>
-                      <a:round/>
-                      <a:headEnd type="none" w="med" len="med"/>
-                      <a:tailEnd type="none" w="med" len="med"/>
-                    </a:lnL>
-                    <a:lnR w="9525" cap="flat" cmpd="sng" algn="ctr">
-                      <a:solidFill>
-                        <a:srgbClr val="D8DEEC"/>
-                      </a:solidFill>
-                      <a:prstDash val="solid"/>
-                      <a:round/>
-                      <a:headEnd type="none" w="med" len="med"/>
-                      <a:tailEnd type="none" w="med" len="med"/>
-                    </a:lnR>
-                    <a:lnT w="9525" cap="flat" cmpd="sng" algn="ctr">
-                      <a:solidFill>
-                        <a:srgbClr val="D8DEEC"/>
-                      </a:solidFill>
-                      <a:prstDash val="solid"/>
-                      <a:round/>
-                      <a:headEnd type="none" w="med" len="med"/>
-                      <a:tailEnd type="none" w="med" len="med"/>
-                    </a:lnT>
-                    <a:lnB w="9525" cap="flat" cmpd="sng" algn="ctr">
-                      <a:solidFill>
-                        <a:srgbClr val="D8DEEC"/>
-                      </a:solidFill>
-                      <a:prstDash val="solid"/>
-                      <a:round/>
-                      <a:headEnd type="none" w="med" len="med"/>
-                      <a:tailEnd type="none" w="med" len="med"/>
-                    </a:lnB>
-                    <a:solidFill>
-                      <a:srgbClr val="FFFFFF"/>
-                    </a:solidFill>
-                  </a:tcPr>
-                </a:tc>
-                <a:tc>
-                  <a:txBody>
-                    <a:bodyPr/>
-                    <a:lstStyle/>
-                    <a:p>
-                      <a:pPr algn="ctr" indent="0" marL="0">
-                        <a:buNone/>
-                      </a:pPr>
-                      <a:r>
-                        <a:rPr lang="en-US" sz="1100" b="1" dirty="0">
-                          <a:solidFill>
-                            <a:srgbClr val="15803D"/>
-                          </a:solidFill>
-                          <a:latin typeface="Calibri" pitchFamily="34" charset="0"/>
-                          <a:ea typeface="Calibri" pitchFamily="34" charset="-122"/>
-                          <a:cs typeface="Calibri" pitchFamily="34" charset="-120"/>
-                        </a:rPr>
-                        <a:t>+157%</a:t>
-                      </a:r>
-                      <a:endParaRPr lang="en-US" sz="1100" dirty="0">
-                        <a:latin typeface="Calibri" charset="0"/>
-                        <a:ea typeface="Calibri" charset="0"/>
-                        <a:cs typeface="Calibri" charset="0"/>
-                      </a:endParaRPr>
-                    </a:p>
-                  </a:txBody>
-                  <a:tcPr marL="91440" marR="91440" marT="45720" marB="45720" anchor="ctr">
-                    <a:lnL w="9525" cap="flat" cmpd="sng" algn="ctr">
-                      <a:solidFill>
-                        <a:srgbClr val="D8DEEC"/>
-                      </a:solidFill>
-                      <a:prstDash val="solid"/>
-                      <a:round/>
-                      <a:headEnd type="none" w="med" len="med"/>
-                      <a:tailEnd type="none" w="med" len="med"/>
-                    </a:lnL>
-                    <a:lnR w="9525" cap="flat" cmpd="sng" algn="ctr">
-                      <a:solidFill>
-                        <a:srgbClr val="D8DEEC"/>
-                      </a:solidFill>
-                      <a:prstDash val="solid"/>
-                      <a:round/>
-                      <a:headEnd type="none" w="med" len="med"/>
-                      <a:tailEnd type="none" w="med" len="med"/>
-                    </a:lnR>
-                    <a:lnT w="9525" cap="flat" cmpd="sng" algn="ctr">
-                      <a:solidFill>
-                        <a:srgbClr val="D8DEEC"/>
-                      </a:solidFill>
-                      <a:prstDash val="solid"/>
-                      <a:round/>
-                      <a:headEnd type="none" w="med" len="med"/>
-                      <a:tailEnd type="none" w="med" len="med"/>
-                    </a:lnT>
-                    <a:lnB w="9525" cap="flat" cmpd="sng" algn="ctr">
-                      <a:solidFill>
-                        <a:srgbClr val="D8DEEC"/>
-                      </a:solidFill>
-                      <a:prstDash val="solid"/>
-                      <a:round/>
-                      <a:headEnd type="none" w="med" len="med"/>
-                      <a:tailEnd type="none" w="med" len="med"/>
-                    </a:lnB>
-                    <a:solidFill>
-                      <a:srgbClr val="FFFFFF"/>
-                    </a:solidFill>
-                  </a:tcPr>
-                </a:tc>
-              </a:tr>
-              <a:tr h="306324">
-                <a:tc>
-                  <a:txBody>
-                    <a:bodyPr/>
-                    <a:lstStyle/>
-                    <a:p>
-                      <a:pPr algn="l" indent="0" marL="0">
-                        <a:buNone/>
-                      </a:pPr>
-                      <a:r>
-                        <a:rPr lang="en-US" sz="1100" dirty="0">
-                          <a:solidFill>
-                            <a:srgbClr val="475569"/>
-                          </a:solidFill>
-                          <a:latin typeface="Calibri" pitchFamily="34" charset="0"/>
-                          <a:ea typeface="Calibri" pitchFamily="34" charset="-122"/>
-                          <a:cs typeface="Calibri" pitchFamily="34" charset="-120"/>
-                        </a:rPr>
-                        <a:t>Quench Hücresi</a:t>
-                      </a:r>
-                      <a:endParaRPr lang="en-US" sz="1100" dirty="0">
-                        <a:latin typeface="Calibri" charset="0"/>
-                        <a:ea typeface="Calibri" charset="0"/>
-                        <a:cs typeface="Calibri" charset="0"/>
-                      </a:endParaRPr>
-                    </a:p>
-                  </a:txBody>
-                  <a:tcPr marL="91440" marR="91440" marT="45720" marB="45720" anchor="ctr">
-                    <a:lnL w="9525" cap="flat" cmpd="sng" algn="ctr">
-                      <a:solidFill>
-                        <a:srgbClr val="D8DEEC"/>
-                      </a:solidFill>
-                      <a:prstDash val="solid"/>
-                      <a:round/>
-                      <a:headEnd type="none" w="med" len="med"/>
-                      <a:tailEnd type="none" w="med" len="med"/>
-                    </a:lnL>
-                    <a:lnR w="9525" cap="flat" cmpd="sng" algn="ctr">
-                      <a:solidFill>
-                        <a:srgbClr val="D8DEEC"/>
-                      </a:solidFill>
-                      <a:prstDash val="solid"/>
-                      <a:round/>
-                      <a:headEnd type="none" w="med" len="med"/>
-                      <a:tailEnd type="none" w="med" len="med"/>
-                    </a:lnR>
-                    <a:lnT w="9525" cap="flat" cmpd="sng" algn="ctr">
-                      <a:solidFill>
-                        <a:srgbClr val="D8DEEC"/>
-                      </a:solidFill>
-                      <a:prstDash val="solid"/>
-                      <a:round/>
-                      <a:headEnd type="none" w="med" len="med"/>
-                      <a:tailEnd type="none" w="med" len="med"/>
-                    </a:lnT>
-                    <a:lnB w="9525" cap="flat" cmpd="sng" algn="ctr">
-                      <a:solidFill>
-                        <a:srgbClr val="D8DEEC"/>
-                      </a:solidFill>
-                      <a:prstDash val="solid"/>
-                      <a:round/>
-                      <a:headEnd type="none" w="med" len="med"/>
-                      <a:tailEnd type="none" w="med" len="med"/>
-                    </a:lnB>
-                    <a:solidFill>
-                      <a:srgbClr val="EEF2FC"/>
-                    </a:solidFill>
-                  </a:tcPr>
-                </a:tc>
-                <a:tc>
-                  <a:txBody>
-                    <a:bodyPr/>
-                    <a:lstStyle/>
-                    <a:p>
-                      <a:pPr algn="ctr" indent="0" marL="0">
-                        <a:buNone/>
-                      </a:pPr>
-                      <a:r>
-                        <a:rPr lang="en-US" sz="1100" dirty="0">
-                          <a:solidFill>
-                            <a:srgbClr val="475569"/>
-                          </a:solidFill>
-                          <a:latin typeface="Calibri" pitchFamily="34" charset="0"/>
-                          <a:ea typeface="Calibri" pitchFamily="34" charset="-122"/>
-                          <a:cs typeface="Calibri" pitchFamily="34" charset="-120"/>
-                        </a:rPr>
-                        <a:t>42.1</a:t>
-                      </a:r>
-                      <a:endParaRPr lang="en-US" sz="1100" dirty="0">
-                        <a:latin typeface="Calibri" charset="0"/>
-                        <a:ea typeface="Calibri" charset="0"/>
-                        <a:cs typeface="Calibri" charset="0"/>
-                      </a:endParaRPr>
-                    </a:p>
-                  </a:txBody>
-                  <a:tcPr marL="91440" marR="91440" marT="45720" marB="45720" anchor="ctr">
-                    <a:lnL w="9525" cap="flat" cmpd="sng" algn="ctr">
-                      <a:solidFill>
-                        <a:srgbClr val="D8DEEC"/>
-                      </a:solidFill>
-                      <a:prstDash val="solid"/>
-                      <a:round/>
-                      <a:headEnd type="none" w="med" len="med"/>
-                      <a:tailEnd type="none" w="med" len="med"/>
-                    </a:lnL>
-                    <a:lnR w="9525" cap="flat" cmpd="sng" algn="ctr">
-                      <a:solidFill>
-                        <a:srgbClr val="D8DEEC"/>
-                      </a:solidFill>
-                      <a:prstDash val="solid"/>
-                      <a:round/>
-                      <a:headEnd type="none" w="med" len="med"/>
-                      <a:tailEnd type="none" w="med" len="med"/>
-                    </a:lnR>
-                    <a:lnT w="9525" cap="flat" cmpd="sng" algn="ctr">
-                      <a:solidFill>
-                        <a:srgbClr val="D8DEEC"/>
-                      </a:solidFill>
-                      <a:prstDash val="solid"/>
-                      <a:round/>
-                      <a:headEnd type="none" w="med" len="med"/>
-                      <a:tailEnd type="none" w="med" len="med"/>
-                    </a:lnT>
-                    <a:lnB w="9525" cap="flat" cmpd="sng" algn="ctr">
-                      <a:solidFill>
-                        <a:srgbClr val="D8DEEC"/>
-                      </a:solidFill>
-                      <a:prstDash val="solid"/>
-                      <a:round/>
-                      <a:headEnd type="none" w="med" len="med"/>
-                      <a:tailEnd type="none" w="med" len="med"/>
-                    </a:lnB>
-                    <a:solidFill>
-                      <a:srgbClr val="EEF2FC"/>
-                    </a:solidFill>
-                  </a:tcPr>
-                </a:tc>
-                <a:tc>
-                  <a:txBody>
-                    <a:bodyPr/>
-                    <a:lstStyle/>
-                    <a:p>
-                      <a:pPr algn="ctr" indent="0" marL="0">
-                        <a:buNone/>
-                      </a:pPr>
-                      <a:r>
-                        <a:rPr lang="en-US" sz="1100" dirty="0">
-                          <a:solidFill>
-                            <a:srgbClr val="475569"/>
-                          </a:solidFill>
-                          <a:latin typeface="Calibri" pitchFamily="34" charset="0"/>
-                          <a:ea typeface="Calibri" pitchFamily="34" charset="-122"/>
-                          <a:cs typeface="Calibri" pitchFamily="34" charset="-120"/>
-                        </a:rPr>
-                        <a:t>90.4</a:t>
-                      </a:r>
-                      <a:endParaRPr lang="en-US" sz="1100" dirty="0">
-                        <a:latin typeface="Calibri" charset="0"/>
-                        <a:ea typeface="Calibri" charset="0"/>
-                        <a:cs typeface="Calibri" charset="0"/>
-                      </a:endParaRPr>
-                    </a:p>
-                  </a:txBody>
-                  <a:tcPr marL="91440" marR="91440" marT="45720" marB="45720" anchor="ctr">
-                    <a:lnL w="9525" cap="flat" cmpd="sng" algn="ctr">
-                      <a:solidFill>
-                        <a:srgbClr val="D8DEEC"/>
-                      </a:solidFill>
-                      <a:prstDash val="solid"/>
-                      <a:round/>
-                      <a:headEnd type="none" w="med" len="med"/>
-                      <a:tailEnd type="none" w="med" len="med"/>
-                    </a:lnL>
-                    <a:lnR w="9525" cap="flat" cmpd="sng" algn="ctr">
-                      <a:solidFill>
-                        <a:srgbClr val="D8DEEC"/>
-                      </a:solidFill>
-                      <a:prstDash val="solid"/>
-                      <a:round/>
-                      <a:headEnd type="none" w="med" len="med"/>
-                      <a:tailEnd type="none" w="med" len="med"/>
-                    </a:lnR>
-                    <a:lnT w="9525" cap="flat" cmpd="sng" algn="ctr">
-                      <a:solidFill>
-                        <a:srgbClr val="D8DEEC"/>
-                      </a:solidFill>
-                      <a:prstDash val="solid"/>
-                      <a:round/>
-                      <a:headEnd type="none" w="med" len="med"/>
-                      <a:tailEnd type="none" w="med" len="med"/>
-                    </a:lnT>
-                    <a:lnB w="9525" cap="flat" cmpd="sng" algn="ctr">
-                      <a:solidFill>
-                        <a:srgbClr val="D8DEEC"/>
-                      </a:solidFill>
-                      <a:prstDash val="solid"/>
-                      <a:round/>
-                      <a:headEnd type="none" w="med" len="med"/>
-                      <a:tailEnd type="none" w="med" len="med"/>
-                    </a:lnB>
-                    <a:solidFill>
-                      <a:srgbClr val="EEF2FC"/>
-                    </a:solidFill>
-                  </a:tcPr>
-                </a:tc>
-                <a:tc>
-                  <a:txBody>
-                    <a:bodyPr/>
-                    <a:lstStyle/>
-                    <a:p>
-                      <a:pPr algn="ctr" indent="0" marL="0">
-                        <a:buNone/>
-                      </a:pPr>
-                      <a:r>
-                        <a:rPr lang="en-US" sz="1100" b="1" dirty="0">
-                          <a:solidFill>
-                            <a:srgbClr val="15803D"/>
-                          </a:solidFill>
-                          <a:latin typeface="Calibri" pitchFamily="34" charset="0"/>
-                          <a:ea typeface="Calibri" pitchFamily="34" charset="-122"/>
-                          <a:cs typeface="Calibri" pitchFamily="34" charset="-120"/>
-                        </a:rPr>
-                        <a:t>+115%</a:t>
-                      </a:r>
-                      <a:endParaRPr lang="en-US" sz="1100" dirty="0">
-                        <a:latin typeface="Calibri" charset="0"/>
-                        <a:ea typeface="Calibri" charset="0"/>
-                        <a:cs typeface="Calibri" charset="0"/>
-                      </a:endParaRPr>
-                    </a:p>
-                  </a:txBody>
-                  <a:tcPr marL="91440" marR="91440" marT="45720" marB="45720" anchor="ctr">
-                    <a:lnL w="9525" cap="flat" cmpd="sng" algn="ctr">
-                      <a:solidFill>
-                        <a:srgbClr val="D8DEEC"/>
-                      </a:solidFill>
-                      <a:prstDash val="solid"/>
-                      <a:round/>
-                      <a:headEnd type="none" w="med" len="med"/>
-                      <a:tailEnd type="none" w="med" len="med"/>
-                    </a:lnL>
-                    <a:lnR w="9525" cap="flat" cmpd="sng" algn="ctr">
-                      <a:solidFill>
-                        <a:srgbClr val="D8DEEC"/>
-                      </a:solidFill>
-                      <a:prstDash val="solid"/>
-                      <a:round/>
-                      <a:headEnd type="none" w="med" len="med"/>
-                      <a:tailEnd type="none" w="med" len="med"/>
-                    </a:lnR>
-                    <a:lnT w="9525" cap="flat" cmpd="sng" algn="ctr">
-                      <a:solidFill>
-                        <a:srgbClr val="D8DEEC"/>
-                      </a:solidFill>
-                      <a:prstDash val="solid"/>
-                      <a:round/>
-                      <a:headEnd type="none" w="med" len="med"/>
-                      <a:tailEnd type="none" w="med" len="med"/>
-                    </a:lnT>
-                    <a:lnB w="9525" cap="flat" cmpd="sng" algn="ctr">
-                      <a:solidFill>
-                        <a:srgbClr val="D8DEEC"/>
-                      </a:solidFill>
-                      <a:prstDash val="solid"/>
-                      <a:round/>
-                      <a:headEnd type="none" w="med" len="med"/>
-                      <a:tailEnd type="none" w="med" len="med"/>
-                    </a:lnB>
-                    <a:solidFill>
-                      <a:srgbClr val="EEF2FC"/>
-                    </a:solidFill>
-                  </a:tcPr>
-                </a:tc>
-              </a:tr>
-              <a:tr h="306324">
-                <a:tc>
-                  <a:txBody>
-                    <a:bodyPr/>
-                    <a:lstStyle/>
-                    <a:p>
-                      <a:pPr algn="l" indent="0" marL="0">
-                        <a:buNone/>
-                      </a:pPr>
-                      <a:r>
-                        <a:rPr lang="en-US" sz="1100" dirty="0">
-                          <a:solidFill>
-                            <a:srgbClr val="475569"/>
-                          </a:solidFill>
-                          <a:latin typeface="Calibri" pitchFamily="34" charset="0"/>
-                          <a:ea typeface="Calibri" pitchFamily="34" charset="-122"/>
-                          <a:cs typeface="Calibri" pitchFamily="34" charset="-120"/>
-                        </a:rPr>
-                        <a:t>ROB110-111 Hücresi</a:t>
-                      </a:r>
-                      <a:endParaRPr lang="en-US" sz="1100" dirty="0">
-                        <a:latin typeface="Calibri" charset="0"/>
-                        <a:ea typeface="Calibri" charset="0"/>
-                        <a:cs typeface="Calibri" charset="0"/>
-                      </a:endParaRPr>
-                    </a:p>
-                  </a:txBody>
-                  <a:tcPr marL="91440" marR="91440" marT="45720" marB="45720" anchor="ctr">
-                    <a:lnL w="9525" cap="flat" cmpd="sng" algn="ctr">
-                      <a:solidFill>
-                        <a:srgbClr val="D8DEEC"/>
-                      </a:solidFill>
-                      <a:prstDash val="solid"/>
-                      <a:round/>
-                      <a:headEnd type="none" w="med" len="med"/>
-                      <a:tailEnd type="none" w="med" len="med"/>
-                    </a:lnL>
-                    <a:lnR w="9525" cap="flat" cmpd="sng" algn="ctr">
-                      <a:solidFill>
-                        <a:srgbClr val="D8DEEC"/>
-                      </a:solidFill>
-                      <a:prstDash val="solid"/>
-                      <a:round/>
-                      <a:headEnd type="none" w="med" len="med"/>
-                      <a:tailEnd type="none" w="med" len="med"/>
-                    </a:lnR>
-                    <a:lnT w="9525" cap="flat" cmpd="sng" algn="ctr">
-                      <a:solidFill>
-                        <a:srgbClr val="D8DEEC"/>
-                      </a:solidFill>
-                      <a:prstDash val="solid"/>
-                      <a:round/>
-                      <a:headEnd type="none" w="med" len="med"/>
-                      <a:tailEnd type="none" w="med" len="med"/>
-                    </a:lnT>
-                    <a:lnB w="9525" cap="flat" cmpd="sng" algn="ctr">
-                      <a:solidFill>
-                        <a:srgbClr val="D8DEEC"/>
-                      </a:solidFill>
-                      <a:prstDash val="solid"/>
-                      <a:round/>
-                      <a:headEnd type="none" w="med" len="med"/>
-                      <a:tailEnd type="none" w="med" len="med"/>
-                    </a:lnB>
-                    <a:solidFill>
-                      <a:srgbClr val="FFFFFF"/>
-                    </a:solidFill>
-                  </a:tcPr>
-                </a:tc>
-                <a:tc>
-                  <a:txBody>
-                    <a:bodyPr/>
-                    <a:lstStyle/>
-                    <a:p>
-                      <a:pPr algn="ctr" indent="0" marL="0">
-                        <a:buNone/>
-                      </a:pPr>
-                      <a:r>
-                        <a:rPr lang="en-US" sz="1100" dirty="0">
-                          <a:solidFill>
-                            <a:srgbClr val="475569"/>
-                          </a:solidFill>
-                          <a:latin typeface="Calibri" pitchFamily="34" charset="0"/>
-                          <a:ea typeface="Calibri" pitchFamily="34" charset="-122"/>
-                          <a:cs typeface="Calibri" pitchFamily="34" charset="-120"/>
-                        </a:rPr>
-                        <a:t>36.5</a:t>
-                      </a:r>
-                      <a:endParaRPr lang="en-US" sz="1100" dirty="0">
-                        <a:latin typeface="Calibri" charset="0"/>
-                        <a:ea typeface="Calibri" charset="0"/>
-                        <a:cs typeface="Calibri" charset="0"/>
-                      </a:endParaRPr>
-                    </a:p>
-                  </a:txBody>
-                  <a:tcPr marL="91440" marR="91440" marT="45720" marB="45720" anchor="ctr">
-                    <a:lnL w="9525" cap="flat" cmpd="sng" algn="ctr">
-                      <a:solidFill>
-                        <a:srgbClr val="D8DEEC"/>
-                      </a:solidFill>
-                      <a:prstDash val="solid"/>
-                      <a:round/>
-                      <a:headEnd type="none" w="med" len="med"/>
-                      <a:tailEnd type="none" w="med" len="med"/>
-                    </a:lnL>
-                    <a:lnR w="9525" cap="flat" cmpd="sng" algn="ctr">
-                      <a:solidFill>
-                        <a:srgbClr val="D8DEEC"/>
-                      </a:solidFill>
-                      <a:prstDash val="solid"/>
-                      <a:round/>
-                      <a:headEnd type="none" w="med" len="med"/>
-                      <a:tailEnd type="none" w="med" len="med"/>
-                    </a:lnR>
-                    <a:lnT w="9525" cap="flat" cmpd="sng" algn="ctr">
-                      <a:solidFill>
-                        <a:srgbClr val="D8DEEC"/>
-                      </a:solidFill>
-                      <a:prstDash val="solid"/>
-                      <a:round/>
-                      <a:headEnd type="none" w="med" len="med"/>
-                      <a:tailEnd type="none" w="med" len="med"/>
-                    </a:lnT>
-                    <a:lnB w="9525" cap="flat" cmpd="sng" algn="ctr">
-                      <a:solidFill>
-                        <a:srgbClr val="D8DEEC"/>
-                      </a:solidFill>
-                      <a:prstDash val="solid"/>
-                      <a:round/>
-                      <a:headEnd type="none" w="med" len="med"/>
-                      <a:tailEnd type="none" w="med" len="med"/>
-                    </a:lnB>
-                    <a:solidFill>
-                      <a:srgbClr val="FFFFFF"/>
-                    </a:solidFill>
-                  </a:tcPr>
-                </a:tc>
-                <a:tc>
-                  <a:txBody>
-                    <a:bodyPr/>
-                    <a:lstStyle/>
-                    <a:p>
-                      <a:pPr algn="ctr" indent="0" marL="0">
-                        <a:buNone/>
-                      </a:pPr>
-                      <a:r>
-                        <a:rPr lang="en-US" sz="1100" dirty="0">
-                          <a:solidFill>
-                            <a:srgbClr val="475569"/>
-                          </a:solidFill>
-                          <a:latin typeface="Calibri" pitchFamily="34" charset="0"/>
-                          <a:ea typeface="Calibri" pitchFamily="34" charset="-122"/>
-                          <a:cs typeface="Calibri" pitchFamily="34" charset="-120"/>
-                        </a:rPr>
-                        <a:t>68.1</a:t>
-                      </a:r>
-                      <a:endParaRPr lang="en-US" sz="1100" dirty="0">
-                        <a:latin typeface="Calibri" charset="0"/>
-                        <a:ea typeface="Calibri" charset="0"/>
-                        <a:cs typeface="Calibri" charset="0"/>
-                      </a:endParaRPr>
-                    </a:p>
-                  </a:txBody>
-                  <a:tcPr marL="91440" marR="91440" marT="45720" marB="45720" anchor="ctr">
-                    <a:lnL w="9525" cap="flat" cmpd="sng" algn="ctr">
-                      <a:solidFill>
-                        <a:srgbClr val="D8DEEC"/>
-                      </a:solidFill>
-                      <a:prstDash val="solid"/>
-                      <a:round/>
-                      <a:headEnd type="none" w="med" len="med"/>
-                      <a:tailEnd type="none" w="med" len="med"/>
-                    </a:lnL>
-                    <a:lnR w="9525" cap="flat" cmpd="sng" algn="ctr">
-                      <a:solidFill>
-                        <a:srgbClr val="D8DEEC"/>
-                      </a:solidFill>
-                      <a:prstDash val="solid"/>
-                      <a:round/>
-                      <a:headEnd type="none" w="med" len="med"/>
-                      <a:tailEnd type="none" w="med" len="med"/>
-                    </a:lnR>
-                    <a:lnT w="9525" cap="flat" cmpd="sng" algn="ctr">
-                      <a:solidFill>
-                        <a:srgbClr val="D8DEEC"/>
-                      </a:solidFill>
-                      <a:prstDash val="solid"/>
-                      <a:round/>
-                      <a:headEnd type="none" w="med" len="med"/>
-                      <a:tailEnd type="none" w="med" len="med"/>
-                    </a:lnT>
-                    <a:lnB w="9525" cap="flat" cmpd="sng" algn="ctr">
-                      <a:solidFill>
-                        <a:srgbClr val="D8DEEC"/>
-                      </a:solidFill>
-                      <a:prstDash val="solid"/>
-                      <a:round/>
-                      <a:headEnd type="none" w="med" len="med"/>
-                      <a:tailEnd type="none" w="med" len="med"/>
-                    </a:lnB>
-                    <a:solidFill>
-                      <a:srgbClr val="FFFFFF"/>
-                    </a:solidFill>
-                  </a:tcPr>
-                </a:tc>
-                <a:tc>
-                  <a:txBody>
-                    <a:bodyPr/>
-                    <a:lstStyle/>
-                    <a:p>
-                      <a:pPr algn="ctr" indent="0" marL="0">
-                        <a:buNone/>
-                      </a:pPr>
-                      <a:r>
-                        <a:rPr lang="en-US" sz="1100" b="1" dirty="0">
-                          <a:solidFill>
-                            <a:srgbClr val="15803D"/>
-                          </a:solidFill>
-                          <a:latin typeface="Calibri" pitchFamily="34" charset="0"/>
-                          <a:ea typeface="Calibri" pitchFamily="34" charset="-122"/>
-                          <a:cs typeface="Calibri" pitchFamily="34" charset="-120"/>
-                        </a:rPr>
-                        <a:t>+87%</a:t>
-                      </a:r>
-                      <a:endParaRPr lang="en-US" sz="1100" dirty="0">
-                        <a:latin typeface="Calibri" charset="0"/>
-                        <a:ea typeface="Calibri" charset="0"/>
-                        <a:cs typeface="Calibri" charset="0"/>
-                      </a:endParaRPr>
-                    </a:p>
-                  </a:txBody>
-                  <a:tcPr marL="91440" marR="91440" marT="45720" marB="45720" anchor="ctr">
-                    <a:lnL w="9525" cap="flat" cmpd="sng" algn="ctr">
-                      <a:solidFill>
-                        <a:srgbClr val="D8DEEC"/>
-                      </a:solidFill>
-                      <a:prstDash val="solid"/>
-                      <a:round/>
-                      <a:headEnd type="none" w="med" len="med"/>
-                      <a:tailEnd type="none" w="med" len="med"/>
-                    </a:lnL>
-                    <a:lnR w="9525" cap="flat" cmpd="sng" algn="ctr">
-                      <a:solidFill>
-                        <a:srgbClr val="D8DEEC"/>
-                      </a:solidFill>
-                      <a:prstDash val="solid"/>
-                      <a:round/>
-                      <a:headEnd type="none" w="med" len="med"/>
-                      <a:tailEnd type="none" w="med" len="med"/>
-                    </a:lnR>
-                    <a:lnT w="9525" cap="flat" cmpd="sng" algn="ctr">
-                      <a:solidFill>
-                        <a:srgbClr val="D8DEEC"/>
-                      </a:solidFill>
-                      <a:prstDash val="solid"/>
-                      <a:round/>
-                      <a:headEnd type="none" w="med" len="med"/>
-                      <a:tailEnd type="none" w="med" len="med"/>
-                    </a:lnT>
-                    <a:lnB w="9525" cap="flat" cmpd="sng" algn="ctr">
-                      <a:solidFill>
-                        <a:srgbClr val="D8DEEC"/>
-                      </a:solidFill>
-                      <a:prstDash val="solid"/>
-                      <a:round/>
-                      <a:headEnd type="none" w="med" len="med"/>
-                      <a:tailEnd type="none" w="med" len="med"/>
-                    </a:lnB>
-                    <a:solidFill>
-                      <a:srgbClr val="FFFFFF"/>
-                    </a:solidFill>
-                  </a:tcPr>
-                </a:tc>
-              </a:tr>
-              <a:tr h="306324">
-                <a:tc>
-                  <a:txBody>
-                    <a:bodyPr/>
-                    <a:lstStyle/>
-                    <a:p>
-                      <a:pPr algn="l" indent="0" marL="0">
-                        <a:buNone/>
-                      </a:pPr>
-                      <a:r>
-                        <a:rPr lang="en-US" sz="1100" dirty="0">
-                          <a:solidFill>
-                            <a:srgbClr val="475569"/>
-                          </a:solidFill>
-                          <a:latin typeface="Calibri" pitchFamily="34" charset="0"/>
-                          <a:ea typeface="Calibri" pitchFamily="34" charset="-122"/>
-                          <a:cs typeface="Calibri" pitchFamily="34" charset="-120"/>
-                        </a:rPr>
-                        <a:t>Fosfat Hücresi</a:t>
-                      </a:r>
-                      <a:endParaRPr lang="en-US" sz="1100" dirty="0">
-                        <a:latin typeface="Calibri" charset="0"/>
-                        <a:ea typeface="Calibri" charset="0"/>
-                        <a:cs typeface="Calibri" charset="0"/>
-                      </a:endParaRPr>
-                    </a:p>
-                  </a:txBody>
-                  <a:tcPr marL="91440" marR="91440" marT="45720" marB="45720" anchor="ctr">
-                    <a:lnL w="9525" cap="flat" cmpd="sng" algn="ctr">
-                      <a:solidFill>
-                        <a:srgbClr val="D8DEEC"/>
-                      </a:solidFill>
-                      <a:prstDash val="solid"/>
-                      <a:round/>
-                      <a:headEnd type="none" w="med" len="med"/>
-                      <a:tailEnd type="none" w="med" len="med"/>
-                    </a:lnL>
-                    <a:lnR w="9525" cap="flat" cmpd="sng" algn="ctr">
-                      <a:solidFill>
-                        <a:srgbClr val="D8DEEC"/>
-                      </a:solidFill>
-                      <a:prstDash val="solid"/>
-                      <a:round/>
-                      <a:headEnd type="none" w="med" len="med"/>
-                      <a:tailEnd type="none" w="med" len="med"/>
-                    </a:lnR>
-                    <a:lnT w="9525" cap="flat" cmpd="sng" algn="ctr">
-                      <a:solidFill>
-                        <a:srgbClr val="D8DEEC"/>
-                      </a:solidFill>
-                      <a:prstDash val="solid"/>
-                      <a:round/>
-                      <a:headEnd type="none" w="med" len="med"/>
-                      <a:tailEnd type="none" w="med" len="med"/>
-                    </a:lnT>
-                    <a:lnB w="9525" cap="flat" cmpd="sng" algn="ctr">
-                      <a:solidFill>
-                        <a:srgbClr val="D8DEEC"/>
-                      </a:solidFill>
-                      <a:prstDash val="solid"/>
-                      <a:round/>
-                      <a:headEnd type="none" w="med" len="med"/>
-                      <a:tailEnd type="none" w="med" len="med"/>
-                    </a:lnB>
-                    <a:solidFill>
-                      <a:srgbClr val="EEF2FC"/>
-                    </a:solidFill>
-                  </a:tcPr>
-                </a:tc>
-                <a:tc>
-                  <a:txBody>
-                    <a:bodyPr/>
-                    <a:lstStyle/>
-                    <a:p>
-                      <a:pPr algn="ctr" indent="0" marL="0">
-                        <a:buNone/>
-                      </a:pPr>
-                      <a:r>
-                        <a:rPr lang="en-US" sz="1100" dirty="0">
-                          <a:solidFill>
-                            <a:srgbClr val="475569"/>
-                          </a:solidFill>
-                          <a:latin typeface="Calibri" pitchFamily="34" charset="0"/>
-                          <a:ea typeface="Calibri" pitchFamily="34" charset="-122"/>
-                          <a:cs typeface="Calibri" pitchFamily="34" charset="-120"/>
-                        </a:rPr>
-                        <a:t>27.2</a:t>
-                      </a:r>
-                      <a:endParaRPr lang="en-US" sz="1100" dirty="0">
-                        <a:latin typeface="Calibri" charset="0"/>
-                        <a:ea typeface="Calibri" charset="0"/>
-                        <a:cs typeface="Calibri" charset="0"/>
-                      </a:endParaRPr>
-                    </a:p>
-                  </a:txBody>
-                  <a:tcPr marL="91440" marR="91440" marT="45720" marB="45720" anchor="ctr">
-                    <a:lnL w="9525" cap="flat" cmpd="sng" algn="ctr">
-                      <a:solidFill>
-                        <a:srgbClr val="D8DEEC"/>
-                      </a:solidFill>
-                      <a:prstDash val="solid"/>
-                      <a:round/>
-                      <a:headEnd type="none" w="med" len="med"/>
-                      <a:tailEnd type="none" w="med" len="med"/>
-                    </a:lnL>
-                    <a:lnR w="9525" cap="flat" cmpd="sng" algn="ctr">
-                      <a:solidFill>
-                        <a:srgbClr val="D8DEEC"/>
-                      </a:solidFill>
-                      <a:prstDash val="solid"/>
-                      <a:round/>
-                      <a:headEnd type="none" w="med" len="med"/>
-                      <a:tailEnd type="none" w="med" len="med"/>
-                    </a:lnR>
-                    <a:lnT w="9525" cap="flat" cmpd="sng" algn="ctr">
-                      <a:solidFill>
-                        <a:srgbClr val="D8DEEC"/>
-                      </a:solidFill>
-                      <a:prstDash val="solid"/>
-                      <a:round/>
-                      <a:headEnd type="none" w="med" len="med"/>
-                      <a:tailEnd type="none" w="med" len="med"/>
-                    </a:lnT>
-                    <a:lnB w="9525" cap="flat" cmpd="sng" algn="ctr">
-                      <a:solidFill>
-                        <a:srgbClr val="D8DEEC"/>
-                      </a:solidFill>
-                      <a:prstDash val="solid"/>
-                      <a:round/>
-                      <a:headEnd type="none" w="med" len="med"/>
-                      <a:tailEnd type="none" w="med" len="med"/>
-                    </a:lnB>
-                    <a:solidFill>
-                      <a:srgbClr val="EEF2FC"/>
-                    </a:solidFill>
-                  </a:tcPr>
-                </a:tc>
-                <a:tc>
-                  <a:txBody>
-                    <a:bodyPr/>
-                    <a:lstStyle/>
-                    <a:p>
-                      <a:pPr algn="ctr" indent="0" marL="0">
-                        <a:buNone/>
-                      </a:pPr>
-                      <a:r>
-                        <a:rPr lang="en-US" sz="1100" b="1" dirty="0">
-                          <a:solidFill>
-                            <a:srgbClr val="B91C1C"/>
-                          </a:solidFill>
-                          <a:latin typeface="Calibri" pitchFamily="34" charset="0"/>
-                          <a:ea typeface="Calibri" pitchFamily="34" charset="-122"/>
-                          <a:cs typeface="Calibri" pitchFamily="34" charset="-120"/>
-                        </a:rPr>
-                        <a:t>veri yok</a:t>
-                      </a:r>
-                      <a:endParaRPr lang="en-US" sz="1100" dirty="0">
-                        <a:latin typeface="Calibri" charset="0"/>
-                        <a:ea typeface="Calibri" charset="0"/>
-                        <a:cs typeface="Calibri" charset="0"/>
-                      </a:endParaRPr>
-                    </a:p>
-                  </a:txBody>
-                  <a:tcPr marL="91440" marR="91440" marT="45720" marB="45720" anchor="ctr">
-                    <a:lnL w="9525" cap="flat" cmpd="sng" algn="ctr">
-                      <a:solidFill>
-                        <a:srgbClr val="D8DEEC"/>
-                      </a:solidFill>
-                      <a:prstDash val="solid"/>
-                      <a:round/>
-                      <a:headEnd type="none" w="med" len="med"/>
-                      <a:tailEnd type="none" w="med" len="med"/>
-                    </a:lnL>
-                    <a:lnR w="9525" cap="flat" cmpd="sng" algn="ctr">
-                      <a:solidFill>
-                        <a:srgbClr val="D8DEEC"/>
-                      </a:solidFill>
-                      <a:prstDash val="solid"/>
-                      <a:round/>
-                      <a:headEnd type="none" w="med" len="med"/>
-                      <a:tailEnd type="none" w="med" len="med"/>
-                    </a:lnR>
-                    <a:lnT w="9525" cap="flat" cmpd="sng" algn="ctr">
-                      <a:solidFill>
-                        <a:srgbClr val="D8DEEC"/>
-                      </a:solidFill>
-                      <a:prstDash val="solid"/>
-                      <a:round/>
-                      <a:headEnd type="none" w="med" len="med"/>
-                      <a:tailEnd type="none" w="med" len="med"/>
-                    </a:lnT>
-                    <a:lnB w="9525" cap="flat" cmpd="sng" algn="ctr">
-                      <a:solidFill>
-                        <a:srgbClr val="D8DEEC"/>
-                      </a:solidFill>
-                      <a:prstDash val="solid"/>
-                      <a:round/>
-                      <a:headEnd type="none" w="med" len="med"/>
-                      <a:tailEnd type="none" w="med" len="med"/>
-                    </a:lnB>
-                    <a:solidFill>
-                      <a:srgbClr val="EEF2FC"/>
-                    </a:solidFill>
-                  </a:tcPr>
-                </a:tc>
-                <a:tc>
-                  <a:txBody>
-                    <a:bodyPr/>
-                    <a:lstStyle/>
-                    <a:p>
-                      <a:pPr algn="ctr" indent="0" marL="0">
-                        <a:buNone/>
-                      </a:pPr>
-                      <a:r>
-                        <a:rPr lang="en-US" sz="1100" dirty="0">
-                          <a:solidFill>
-                            <a:srgbClr val="B91C1C"/>
-                          </a:solidFill>
-                          <a:latin typeface="Calibri" pitchFamily="34" charset="0"/>
-                          <a:ea typeface="Calibri" pitchFamily="34" charset="-122"/>
-                          <a:cs typeface="Calibri" pitchFamily="34" charset="-120"/>
-                        </a:rPr>
-                        <a:t>—</a:t>
-                      </a:r>
-                      <a:endParaRPr lang="en-US" sz="1100" dirty="0">
-                        <a:latin typeface="Calibri" charset="0"/>
-                        <a:ea typeface="Calibri" charset="0"/>
-                        <a:cs typeface="Calibri" charset="0"/>
-                      </a:endParaRPr>
-                    </a:p>
-                  </a:txBody>
-                  <a:tcPr marL="91440" marR="91440" marT="45720" marB="45720" anchor="ctr">
-                    <a:lnL w="9525" cap="flat" cmpd="sng" algn="ctr">
-                      <a:solidFill>
-                        <a:srgbClr val="D8DEEC"/>
-                      </a:solidFill>
-                      <a:prstDash val="solid"/>
-                      <a:round/>
-                      <a:headEnd type="none" w="med" len="med"/>
-                      <a:tailEnd type="none" w="med" len="med"/>
-                    </a:lnL>
-                    <a:lnR w="9525" cap="flat" cmpd="sng" algn="ctr">
-                      <a:solidFill>
-                        <a:srgbClr val="D8DEEC"/>
-                      </a:solidFill>
-                      <a:prstDash val="solid"/>
-                      <a:round/>
-                      <a:headEnd type="none" w="med" len="med"/>
-                      <a:tailEnd type="none" w="med" len="med"/>
-                    </a:lnR>
-                    <a:lnT w="9525" cap="flat" cmpd="sng" algn="ctr">
-                      <a:solidFill>
-                        <a:srgbClr val="D8DEEC"/>
-                      </a:solidFill>
-                      <a:prstDash val="solid"/>
-                      <a:round/>
-                      <a:headEnd type="none" w="med" len="med"/>
-                      <a:tailEnd type="none" w="med" len="med"/>
-                    </a:lnT>
-                    <a:lnB w="9525" cap="flat" cmpd="sng" algn="ctr">
-                      <a:solidFill>
-                        <a:srgbClr val="D8DEEC"/>
-                      </a:solidFill>
-                      <a:prstDash val="solid"/>
-                      <a:round/>
-                      <a:headEnd type="none" w="med" len="med"/>
-                      <a:tailEnd type="none" w="med" len="med"/>
-                    </a:lnB>
-                    <a:solidFill>
-                      <a:srgbClr val="EEF2FC"/>
-                    </a:solidFill>
-                  </a:tcPr>
-                </a:tc>
-              </a:tr>
-              <a:tr h="306324">
-                <a:tc>
-                  <a:txBody>
-                    <a:bodyPr/>
-                    <a:lstStyle/>
-                    <a:p>
-                      <a:pPr algn="l" indent="0" marL="0">
-                        <a:buNone/>
-                      </a:pPr>
-                      <a:r>
-                        <a:rPr lang="en-US" sz="1100" dirty="0">
-                          <a:solidFill>
-                            <a:srgbClr val="475569"/>
-                          </a:solidFill>
-                          <a:latin typeface="Calibri" pitchFamily="34" charset="0"/>
-                          <a:ea typeface="Calibri" pitchFamily="34" charset="-122"/>
-                          <a:cs typeface="Calibri" pitchFamily="34" charset="-120"/>
-                        </a:rPr>
-                        <a:t>Boya Hücresi</a:t>
-                      </a:r>
-                      <a:endParaRPr lang="en-US" sz="1100" dirty="0">
-                        <a:latin typeface="Calibri" charset="0"/>
-                        <a:ea typeface="Calibri" charset="0"/>
-                        <a:cs typeface="Calibri" charset="0"/>
-                      </a:endParaRPr>
-                    </a:p>
-                  </a:txBody>
-                  <a:tcPr marL="91440" marR="91440" marT="45720" marB="45720" anchor="ctr">
-                    <a:lnL w="9525" cap="flat" cmpd="sng" algn="ctr">
-                      <a:solidFill>
-                        <a:srgbClr val="D8DEEC"/>
-                      </a:solidFill>
-                      <a:prstDash val="solid"/>
-                      <a:round/>
-                      <a:headEnd type="none" w="med" len="med"/>
-                      <a:tailEnd type="none" w="med" len="med"/>
-                    </a:lnL>
-                    <a:lnR w="9525" cap="flat" cmpd="sng" algn="ctr">
-                      <a:solidFill>
-                        <a:srgbClr val="D8DEEC"/>
-                      </a:solidFill>
-                      <a:prstDash val="solid"/>
-                      <a:round/>
-                      <a:headEnd type="none" w="med" len="med"/>
-                      <a:tailEnd type="none" w="med" len="med"/>
-                    </a:lnR>
-                    <a:lnT w="9525" cap="flat" cmpd="sng" algn="ctr">
-                      <a:solidFill>
-                        <a:srgbClr val="D8DEEC"/>
-                      </a:solidFill>
-                      <a:prstDash val="solid"/>
-                      <a:round/>
-                      <a:headEnd type="none" w="med" len="med"/>
-                      <a:tailEnd type="none" w="med" len="med"/>
-                    </a:lnT>
-                    <a:lnB w="9525" cap="flat" cmpd="sng" algn="ctr">
-                      <a:solidFill>
-                        <a:srgbClr val="D8DEEC"/>
-                      </a:solidFill>
-                      <a:prstDash val="solid"/>
-                      <a:round/>
-                      <a:headEnd type="none" w="med" len="med"/>
-                      <a:tailEnd type="none" w="med" len="med"/>
-                    </a:lnB>
-                    <a:solidFill>
-                      <a:srgbClr val="FFFFFF"/>
-                    </a:solidFill>
-                  </a:tcPr>
-                </a:tc>
-                <a:tc>
-                  <a:txBody>
-                    <a:bodyPr/>
-                    <a:lstStyle/>
-                    <a:p>
-                      <a:pPr algn="ctr" indent="0" marL="0">
-                        <a:buNone/>
-                      </a:pPr>
-                      <a:r>
-                        <a:rPr lang="en-US" sz="1100" dirty="0">
-                          <a:solidFill>
-                            <a:srgbClr val="475569"/>
-                          </a:solidFill>
-                          <a:latin typeface="Calibri" pitchFamily="34" charset="0"/>
-                          <a:ea typeface="Calibri" pitchFamily="34" charset="-122"/>
-                          <a:cs typeface="Calibri" pitchFamily="34" charset="-120"/>
-                        </a:rPr>
-                        <a:t>24.8</a:t>
-                      </a:r>
-                      <a:endParaRPr lang="en-US" sz="1100" dirty="0">
-                        <a:latin typeface="Calibri" charset="0"/>
-                        <a:ea typeface="Calibri" charset="0"/>
-                        <a:cs typeface="Calibri" charset="0"/>
-                      </a:endParaRPr>
-                    </a:p>
-                  </a:txBody>
-                  <a:tcPr marL="91440" marR="91440" marT="45720" marB="45720" anchor="ctr">
-                    <a:lnL w="9525" cap="flat" cmpd="sng" algn="ctr">
-                      <a:solidFill>
-                        <a:srgbClr val="D8DEEC"/>
-                      </a:solidFill>
-                      <a:prstDash val="solid"/>
-                      <a:round/>
-                      <a:headEnd type="none" w="med" len="med"/>
-                      <a:tailEnd type="none" w="med" len="med"/>
-                    </a:lnL>
-                    <a:lnR w="9525" cap="flat" cmpd="sng" algn="ctr">
-                      <a:solidFill>
-                        <a:srgbClr val="D8DEEC"/>
-                      </a:solidFill>
-                      <a:prstDash val="solid"/>
-                      <a:round/>
-                      <a:headEnd type="none" w="med" len="med"/>
-                      <a:tailEnd type="none" w="med" len="med"/>
-                    </a:lnR>
-                    <a:lnT w="9525" cap="flat" cmpd="sng" algn="ctr">
-                      <a:solidFill>
-                        <a:srgbClr val="D8DEEC"/>
-                      </a:solidFill>
-                      <a:prstDash val="solid"/>
-                      <a:round/>
-                      <a:headEnd type="none" w="med" len="med"/>
-                      <a:tailEnd type="none" w="med" len="med"/>
-                    </a:lnT>
-                    <a:lnB w="9525" cap="flat" cmpd="sng" algn="ctr">
-                      <a:solidFill>
-                        <a:srgbClr val="D8DEEC"/>
-                      </a:solidFill>
-                      <a:prstDash val="solid"/>
-                      <a:round/>
-                      <a:headEnd type="none" w="med" len="med"/>
-                      <a:tailEnd type="none" w="med" len="med"/>
-                    </a:lnB>
-                    <a:solidFill>
-                      <a:srgbClr val="FFFFFF"/>
-                    </a:solidFill>
-                  </a:tcPr>
-                </a:tc>
-                <a:tc>
-                  <a:txBody>
-                    <a:bodyPr/>
-                    <a:lstStyle/>
-                    <a:p>
-                      <a:pPr algn="ctr" indent="0" marL="0">
-                        <a:buNone/>
-                      </a:pPr>
-                      <a:r>
-                        <a:rPr lang="en-US" sz="1100" b="1" dirty="0">
-                          <a:solidFill>
-                            <a:srgbClr val="B91C1C"/>
-                          </a:solidFill>
-                          <a:latin typeface="Calibri" pitchFamily="34" charset="0"/>
-                          <a:ea typeface="Calibri" pitchFamily="34" charset="-122"/>
-                          <a:cs typeface="Calibri" pitchFamily="34" charset="-120"/>
-                        </a:rPr>
-                        <a:t>veri yok</a:t>
-                      </a:r>
-                      <a:endParaRPr lang="en-US" sz="1100" dirty="0">
-                        <a:latin typeface="Calibri" charset="0"/>
-                        <a:ea typeface="Calibri" charset="0"/>
-                        <a:cs typeface="Calibri" charset="0"/>
-                      </a:endParaRPr>
-                    </a:p>
-                  </a:txBody>
-                  <a:tcPr marL="91440" marR="91440" marT="45720" marB="45720" anchor="ctr">
-                    <a:lnL w="9525" cap="flat" cmpd="sng" algn="ctr">
-                      <a:solidFill>
-                        <a:srgbClr val="D8DEEC"/>
-                      </a:solidFill>
-                      <a:prstDash val="solid"/>
-                      <a:round/>
-                      <a:headEnd type="none" w="med" len="med"/>
-                      <a:tailEnd type="none" w="med" len="med"/>
-                    </a:lnL>
-                    <a:lnR w="9525" cap="flat" cmpd="sng" algn="ctr">
-                      <a:solidFill>
-                        <a:srgbClr val="D8DEEC"/>
-                      </a:solidFill>
-                      <a:prstDash val="solid"/>
-                      <a:round/>
-                      <a:headEnd type="none" w="med" len="med"/>
-                      <a:tailEnd type="none" w="med" len="med"/>
-                    </a:lnR>
-                    <a:lnT w="9525" cap="flat" cmpd="sng" algn="ctr">
-                      <a:solidFill>
-                        <a:srgbClr val="D8DEEC"/>
-                      </a:solidFill>
-                      <a:prstDash val="solid"/>
-                      <a:round/>
-                      <a:headEnd type="none" w="med" len="med"/>
-                      <a:tailEnd type="none" w="med" len="med"/>
-                    </a:lnT>
-                    <a:lnB w="9525" cap="flat" cmpd="sng" algn="ctr">
-                      <a:solidFill>
-                        <a:srgbClr val="D8DEEC"/>
-                      </a:solidFill>
-                      <a:prstDash val="solid"/>
-                      <a:round/>
-                      <a:headEnd type="none" w="med" len="med"/>
-                      <a:tailEnd type="none" w="med" len="med"/>
-                    </a:lnB>
-                    <a:solidFill>
-                      <a:srgbClr val="FFFFFF"/>
-                    </a:solidFill>
-                  </a:tcPr>
-                </a:tc>
-                <a:tc>
-                  <a:txBody>
-                    <a:bodyPr/>
-                    <a:lstStyle/>
-                    <a:p>
-                      <a:pPr algn="ctr" indent="0" marL="0">
-                        <a:buNone/>
-                      </a:pPr>
-                      <a:r>
-                        <a:rPr lang="en-US" sz="1100" dirty="0">
-                          <a:solidFill>
-                            <a:srgbClr val="B91C1C"/>
-                          </a:solidFill>
-                          <a:latin typeface="Calibri" pitchFamily="34" charset="0"/>
-                          <a:ea typeface="Calibri" pitchFamily="34" charset="-122"/>
-                          <a:cs typeface="Calibri" pitchFamily="34" charset="-120"/>
-                        </a:rPr>
-                        <a:t>—</a:t>
-                      </a:r>
-                      <a:endParaRPr lang="en-US" sz="1100" dirty="0">
-                        <a:latin typeface="Calibri" charset="0"/>
-                        <a:ea typeface="Calibri" charset="0"/>
-                        <a:cs typeface="Calibri" charset="0"/>
-                      </a:endParaRPr>
-                    </a:p>
-                  </a:txBody>
-                  <a:tcPr marL="91440" marR="91440" marT="45720" marB="45720" anchor="ctr">
-                    <a:lnL w="9525" cap="flat" cmpd="sng" algn="ctr">
-                      <a:solidFill>
-                        <a:srgbClr val="D8DEEC"/>
-                      </a:solidFill>
-                      <a:prstDash val="solid"/>
-                      <a:round/>
-                      <a:headEnd type="none" w="med" len="med"/>
-                      <a:tailEnd type="none" w="med" len="med"/>
-                    </a:lnL>
-                    <a:lnR w="9525" cap="flat" cmpd="sng" algn="ctr">
-                      <a:solidFill>
-                        <a:srgbClr val="D8DEEC"/>
-                      </a:solidFill>
-                      <a:prstDash val="solid"/>
-                      <a:round/>
-                      <a:headEnd type="none" w="med" len="med"/>
-                      <a:tailEnd type="none" w="med" len="med"/>
-                    </a:lnR>
-                    <a:lnT w="9525" cap="flat" cmpd="sng" algn="ctr">
-                      <a:solidFill>
-                        <a:srgbClr val="D8DEEC"/>
-                      </a:solidFill>
-                      <a:prstDash val="solid"/>
-                      <a:round/>
-                      <a:headEnd type="none" w="med" len="med"/>
-                      <a:tailEnd type="none" w="med" len="med"/>
-                    </a:lnT>
-                    <a:lnB w="9525" cap="flat" cmpd="sng" algn="ctr">
-                      <a:solidFill>
-                        <a:srgbClr val="D8DEEC"/>
-                      </a:solidFill>
-                      <a:prstDash val="solid"/>
-                      <a:round/>
-                      <a:headEnd type="none" w="med" len="med"/>
-                      <a:tailEnd type="none" w="med" len="med"/>
-                    </a:lnB>
-                    <a:solidFill>
-                      <a:srgbClr val="FFFFFF"/>
-                    </a:solidFill>
-                  </a:tcPr>
-                </a:tc>
-              </a:tr>
-            </a:tbl>
-          </a:graphicData>
-        </a:graphic>
-      </p:graphicFrame>
-      <p:sp>
-        <p:nvSpPr>
-          <p:cNvPr id="8" name="Text 4"/>
+      <p:sp>
+        <p:nvSpPr>
+          <p:cNvPr id="8" name="Shape 5"/>
+          <p:cNvSpPr/>
+          <p:nvPr/>
+        </p:nvSpPr>
+        <p:spPr>
+          <a:xfrm>
+            <a:off x="6217920" y="1298448"/>
+            <a:ext cx="109728" cy="109728"/>
+          </a:xfrm>
+          <a:prstGeom prst="ellipse">
+            <a:avLst/>
+          </a:prstGeom>
+          <a:solidFill>
+            <a:srgbClr val="1E2761"/>
+          </a:solidFill>
+          <a:ln/>
+        </p:spPr>
+      </p:sp>
+      <p:sp>
+        <p:nvSpPr>
+          <p:cNvPr id="9" name="Text 6"/>
+          <p:cNvSpPr/>
+          <p:nvPr/>
+        </p:nvSpPr>
+        <p:spPr>
+          <a:xfrm>
+            <a:off x="6400800" y="1243584"/>
+            <a:ext cx="1645920" cy="228600"/>
+          </a:xfrm>
+          <a:prstGeom prst="rect">
+            <a:avLst/>
+          </a:prstGeom>
+          <a:noFill/>
+          <a:ln/>
+        </p:spPr>
+        <p:txBody>
+          <a:bodyPr wrap="square" lIns="0" tIns="0" rIns="0" bIns="0" rtlCol="0" anchor="ctr"/>
+          <a:lstStyle/>
+          <a:p>
+            <a:pPr indent="0" marL="0">
+              <a:buNone/>
+            </a:pPr>
+            <a:r>
+              <a:rPr lang="en-US" sz="1100" dirty="0">
+                <a:solidFill>
+                  <a:srgbClr val="475569"/>
+                </a:solidFill>
+                <a:latin typeface="Calibri" pitchFamily="34" charset="0"/>
+                <a:ea typeface="Calibri" pitchFamily="34" charset="-122"/>
+                <a:cs typeface="Calibri" pitchFamily="34" charset="-120"/>
+              </a:rPr>
+              <a:t>Haziran–Temmuz</a:t>
+            </a:r>
+            <a:endParaRPr lang="en-US" sz="1100" dirty="0"/>
+          </a:p>
+        </p:txBody>
+      </p:sp>
+      <p:sp>
+        <p:nvSpPr>
+          <p:cNvPr id="10" name="Shape 7"/>
+          <p:cNvSpPr/>
+          <p:nvPr/>
+        </p:nvSpPr>
+        <p:spPr>
+          <a:xfrm>
+            <a:off x="2743200" y="1645920"/>
+            <a:ext cx="0" cy="3931920"/>
+          </a:xfrm>
+          <a:prstGeom prst="line">
+            <a:avLst/>
+          </a:prstGeom>
+          <a:noFill/>
+          <a:ln w="12700">
+            <a:solidFill>
+              <a:srgbClr val="D8DEEC"/>
+            </a:solidFill>
+            <a:prstDash val="solid"/>
+          </a:ln>
+        </p:spPr>
+      </p:sp>
+      <p:sp>
+        <p:nvSpPr>
+          <p:cNvPr id="11" name="Text 8"/>
+          <p:cNvSpPr/>
+          <p:nvPr/>
+        </p:nvSpPr>
+        <p:spPr>
+          <a:xfrm>
+            <a:off x="2377440" y="5623560"/>
+            <a:ext cx="731520" cy="274320"/>
+          </a:xfrm>
+          <a:prstGeom prst="rect">
+            <a:avLst/>
+          </a:prstGeom>
+          <a:noFill/>
+          <a:ln/>
+        </p:spPr>
+        <p:txBody>
+          <a:bodyPr wrap="square" lIns="0" tIns="0" rIns="0" bIns="0" rtlCol="0" anchor="ctr"/>
+          <a:lstStyle/>
+          <a:p>
+            <a:pPr algn="ctr" indent="0" marL="0">
+              <a:buNone/>
+            </a:pPr>
+            <a:r>
+              <a:rPr lang="en-US" sz="1000" dirty="0">
+                <a:solidFill>
+                  <a:srgbClr val="475569"/>
+                </a:solidFill>
+                <a:latin typeface="Calibri" pitchFamily="34" charset="0"/>
+                <a:ea typeface="Calibri" pitchFamily="34" charset="-122"/>
+                <a:cs typeface="Calibri" pitchFamily="34" charset="-120"/>
+              </a:rPr>
+              <a:t>0</a:t>
+            </a:r>
+            <a:endParaRPr lang="en-US" sz="1000" dirty="0"/>
+          </a:p>
+        </p:txBody>
+      </p:sp>
+      <p:sp>
+        <p:nvSpPr>
+          <p:cNvPr id="12" name="Shape 9"/>
+          <p:cNvSpPr/>
+          <p:nvPr/>
+        </p:nvSpPr>
+        <p:spPr>
+          <a:xfrm>
+            <a:off x="5029200" y="1645920"/>
+            <a:ext cx="0" cy="3931920"/>
+          </a:xfrm>
+          <a:prstGeom prst="line">
+            <a:avLst/>
+          </a:prstGeom>
+          <a:noFill/>
+          <a:ln w="12700">
+            <a:solidFill>
+              <a:srgbClr val="D8DEEC"/>
+            </a:solidFill>
+            <a:prstDash val="solid"/>
+          </a:ln>
+        </p:spPr>
+      </p:sp>
+      <p:sp>
+        <p:nvSpPr>
+          <p:cNvPr id="13" name="Text 10"/>
+          <p:cNvSpPr/>
+          <p:nvPr/>
+        </p:nvSpPr>
+        <p:spPr>
+          <a:xfrm>
+            <a:off x="4663440" y="5623560"/>
+            <a:ext cx="731520" cy="274320"/>
+          </a:xfrm>
+          <a:prstGeom prst="rect">
+            <a:avLst/>
+          </a:prstGeom>
+          <a:noFill/>
+          <a:ln/>
+        </p:spPr>
+        <p:txBody>
+          <a:bodyPr wrap="square" lIns="0" tIns="0" rIns="0" bIns="0" rtlCol="0" anchor="ctr"/>
+          <a:lstStyle/>
+          <a:p>
+            <a:pPr algn="ctr" indent="0" marL="0">
+              <a:buNone/>
+            </a:pPr>
+            <a:r>
+              <a:rPr lang="en-US" sz="1000" dirty="0">
+                <a:solidFill>
+                  <a:srgbClr val="475569"/>
+                </a:solidFill>
+                <a:latin typeface="Calibri" pitchFamily="34" charset="0"/>
+                <a:ea typeface="Calibri" pitchFamily="34" charset="-122"/>
+                <a:cs typeface="Calibri" pitchFamily="34" charset="-120"/>
+              </a:rPr>
+              <a:t>50</a:t>
+            </a:r>
+            <a:endParaRPr lang="en-US" sz="1000" dirty="0"/>
+          </a:p>
+        </p:txBody>
+      </p:sp>
+      <p:sp>
+        <p:nvSpPr>
+          <p:cNvPr id="14" name="Shape 11"/>
+          <p:cNvSpPr/>
+          <p:nvPr/>
+        </p:nvSpPr>
+        <p:spPr>
+          <a:xfrm>
+            <a:off x="7315200" y="1645920"/>
+            <a:ext cx="0" cy="3931920"/>
+          </a:xfrm>
+          <a:prstGeom prst="line">
+            <a:avLst/>
+          </a:prstGeom>
+          <a:noFill/>
+          <a:ln w="12700">
+            <a:solidFill>
+              <a:srgbClr val="D8DEEC"/>
+            </a:solidFill>
+            <a:prstDash val="solid"/>
+          </a:ln>
+        </p:spPr>
+      </p:sp>
+      <p:sp>
+        <p:nvSpPr>
+          <p:cNvPr id="15" name="Text 12"/>
+          <p:cNvSpPr/>
+          <p:nvPr/>
+        </p:nvSpPr>
+        <p:spPr>
+          <a:xfrm>
+            <a:off x="6949440" y="5623560"/>
+            <a:ext cx="731520" cy="274320"/>
+          </a:xfrm>
+          <a:prstGeom prst="rect">
+            <a:avLst/>
+          </a:prstGeom>
+          <a:noFill/>
+          <a:ln/>
+        </p:spPr>
+        <p:txBody>
+          <a:bodyPr wrap="square" lIns="0" tIns="0" rIns="0" bIns="0" rtlCol="0" anchor="ctr"/>
+          <a:lstStyle/>
+          <a:p>
+            <a:pPr algn="ctr" indent="0" marL="0">
+              <a:buNone/>
+            </a:pPr>
+            <a:r>
+              <a:rPr lang="en-US" sz="1000" dirty="0">
+                <a:solidFill>
+                  <a:srgbClr val="475569"/>
+                </a:solidFill>
+                <a:latin typeface="Calibri" pitchFamily="34" charset="0"/>
+                <a:ea typeface="Calibri" pitchFamily="34" charset="-122"/>
+                <a:cs typeface="Calibri" pitchFamily="34" charset="-120"/>
+              </a:rPr>
+              <a:t>100</a:t>
+            </a:r>
+            <a:endParaRPr lang="en-US" sz="1000" dirty="0"/>
+          </a:p>
+        </p:txBody>
+      </p:sp>
+      <p:sp>
+        <p:nvSpPr>
+          <p:cNvPr id="16" name="Shape 13"/>
+          <p:cNvSpPr/>
+          <p:nvPr/>
+        </p:nvSpPr>
+        <p:spPr>
+          <a:xfrm>
+            <a:off x="9601200" y="1645920"/>
+            <a:ext cx="0" cy="3931920"/>
+          </a:xfrm>
+          <a:prstGeom prst="line">
+            <a:avLst/>
+          </a:prstGeom>
+          <a:noFill/>
+          <a:ln w="12700">
+            <a:solidFill>
+              <a:srgbClr val="D8DEEC"/>
+            </a:solidFill>
+            <a:prstDash val="solid"/>
+          </a:ln>
+        </p:spPr>
+      </p:sp>
+      <p:sp>
+        <p:nvSpPr>
+          <p:cNvPr id="17" name="Text 14"/>
+          <p:cNvSpPr/>
+          <p:nvPr/>
+        </p:nvSpPr>
+        <p:spPr>
+          <a:xfrm>
+            <a:off x="8869680" y="5623560"/>
+            <a:ext cx="1463040" cy="274320"/>
+          </a:xfrm>
+          <a:prstGeom prst="rect">
+            <a:avLst/>
+          </a:prstGeom>
+          <a:noFill/>
+          <a:ln/>
+        </p:spPr>
+        <p:txBody>
+          <a:bodyPr wrap="square" lIns="0" tIns="0" rIns="0" bIns="0" rtlCol="0" anchor="ctr"/>
+          <a:lstStyle/>
+          <a:p>
+            <a:pPr algn="l" indent="0" marL="0">
+              <a:buNone/>
+            </a:pPr>
+            <a:r>
+              <a:rPr lang="en-US" sz="1000" dirty="0">
+                <a:solidFill>
+                  <a:srgbClr val="475569"/>
+                </a:solidFill>
+                <a:latin typeface="Calibri" pitchFamily="34" charset="0"/>
+                <a:ea typeface="Calibri" pitchFamily="34" charset="-122"/>
+                <a:cs typeface="Calibri" pitchFamily="34" charset="-120"/>
+              </a:rPr>
+              <a:t>150 adet/gün</a:t>
+            </a:r>
+            <a:endParaRPr lang="en-US" sz="1000" dirty="0"/>
+          </a:p>
+        </p:txBody>
+      </p:sp>
+      <p:sp>
+        <p:nvSpPr>
+          <p:cNvPr id="18" name="Text 15"/>
+          <p:cNvSpPr/>
+          <p:nvPr/>
+        </p:nvSpPr>
+        <p:spPr>
+          <a:xfrm>
+            <a:off x="548640" y="1719072"/>
+            <a:ext cx="2011680" cy="274320"/>
+          </a:xfrm>
+          <a:prstGeom prst="rect">
+            <a:avLst/>
+          </a:prstGeom>
+          <a:noFill/>
+          <a:ln/>
+        </p:spPr>
+        <p:txBody>
+          <a:bodyPr wrap="square" lIns="0" tIns="0" rIns="0" bIns="0" rtlCol="0" anchor="ctr"/>
+          <a:lstStyle/>
+          <a:p>
+            <a:pPr algn="l" indent="0" marL="0">
+              <a:buNone/>
+            </a:pPr>
+            <a:r>
+              <a:rPr lang="en-US" sz="1200" b="1" dirty="0">
+                <a:solidFill>
+                  <a:srgbClr val="141B47"/>
+                </a:solidFill>
+                <a:latin typeface="Cambria" pitchFamily="34" charset="0"/>
+                <a:ea typeface="Cambria" pitchFamily="34" charset="-122"/>
+                <a:cs typeface="Cambria" pitchFamily="34" charset="-120"/>
+              </a:rPr>
+              <a:t>Pres</a:t>
+            </a:r>
+            <a:endParaRPr lang="en-US" sz="1200" dirty="0"/>
+          </a:p>
+        </p:txBody>
+      </p:sp>
+      <p:sp>
+        <p:nvSpPr>
+          <p:cNvPr id="19" name="Shape 16"/>
+          <p:cNvSpPr/>
+          <p:nvPr/>
+        </p:nvSpPr>
+        <p:spPr>
+          <a:xfrm>
+            <a:off x="6469380" y="1828800"/>
+            <a:ext cx="2148840" cy="0"/>
+          </a:xfrm>
+          <a:prstGeom prst="line">
+            <a:avLst/>
+          </a:prstGeom>
+          <a:noFill/>
+          <a:ln w="25400">
+            <a:solidFill>
+              <a:srgbClr val="1E2761"/>
+            </a:solidFill>
+            <a:prstDash val="solid"/>
+          </a:ln>
+        </p:spPr>
+      </p:sp>
+      <p:sp>
+        <p:nvSpPr>
+          <p:cNvPr id="20" name="Shape 17"/>
+          <p:cNvSpPr/>
+          <p:nvPr/>
+        </p:nvSpPr>
+        <p:spPr>
+          <a:xfrm>
+            <a:off x="6405372" y="1764792"/>
+            <a:ext cx="128016" cy="128016"/>
+          </a:xfrm>
+          <a:prstGeom prst="ellipse">
+            <a:avLst/>
+          </a:prstGeom>
+          <a:solidFill>
+            <a:srgbClr val="CADCFC"/>
+          </a:solidFill>
+          <a:ln/>
+        </p:spPr>
+      </p:sp>
+      <p:sp>
+        <p:nvSpPr>
+          <p:cNvPr id="21" name="Shape 18"/>
+          <p:cNvSpPr/>
+          <p:nvPr/>
+        </p:nvSpPr>
+        <p:spPr>
+          <a:xfrm>
+            <a:off x="8554212" y="1764792"/>
+            <a:ext cx="128016" cy="128016"/>
+          </a:xfrm>
+          <a:prstGeom prst="ellipse">
+            <a:avLst/>
+          </a:prstGeom>
+          <a:solidFill>
+            <a:srgbClr val="1E2761"/>
+          </a:solidFill>
+          <a:ln/>
+        </p:spPr>
+      </p:sp>
+      <p:sp>
+        <p:nvSpPr>
+          <p:cNvPr id="22" name="Text 19"/>
+          <p:cNvSpPr/>
+          <p:nvPr/>
+        </p:nvSpPr>
+        <p:spPr>
+          <a:xfrm>
+            <a:off x="8755380" y="1719072"/>
+            <a:ext cx="1097280" cy="274320"/>
+          </a:xfrm>
+          <a:prstGeom prst="rect">
+            <a:avLst/>
+          </a:prstGeom>
+          <a:noFill/>
+          <a:ln/>
+        </p:spPr>
+        <p:txBody>
+          <a:bodyPr wrap="square" lIns="0" tIns="0" rIns="0" bIns="0" rtlCol="0" anchor="ctr"/>
+          <a:lstStyle/>
+          <a:p>
+            <a:pPr algn="l" indent="0" marL="0">
+              <a:buNone/>
+            </a:pPr>
+            <a:r>
+              <a:rPr lang="en-US" sz="1100" b="1" dirty="0">
+                <a:solidFill>
+                  <a:srgbClr val="15803D"/>
+                </a:solidFill>
+                <a:latin typeface="Calibri" pitchFamily="34" charset="0"/>
+                <a:ea typeface="Calibri" pitchFamily="34" charset="-122"/>
+                <a:cs typeface="Calibri" pitchFamily="34" charset="-120"/>
+              </a:rPr>
+              <a:t>+58%</a:t>
+            </a:r>
+            <a:endParaRPr lang="en-US" sz="1100" dirty="0"/>
+          </a:p>
+        </p:txBody>
+      </p:sp>
+      <p:sp>
+        <p:nvSpPr>
+          <p:cNvPr id="23" name="Text 20"/>
+          <p:cNvSpPr/>
+          <p:nvPr/>
+        </p:nvSpPr>
+        <p:spPr>
+          <a:xfrm>
+            <a:off x="548640" y="2066544"/>
+            <a:ext cx="2011680" cy="274320"/>
+          </a:xfrm>
+          <a:prstGeom prst="rect">
+            <a:avLst/>
+          </a:prstGeom>
+          <a:noFill/>
+          <a:ln/>
+        </p:spPr>
+        <p:txBody>
+          <a:bodyPr wrap="square" lIns="0" tIns="0" rIns="0" bIns="0" rtlCol="0" anchor="ctr"/>
+          <a:lstStyle/>
+          <a:p>
+            <a:pPr algn="l" indent="0" marL="0">
+              <a:buNone/>
+            </a:pPr>
+            <a:r>
+              <a:rPr lang="en-US" sz="1200" b="1" dirty="0">
+                <a:solidFill>
+                  <a:srgbClr val="141B47"/>
+                </a:solidFill>
+                <a:latin typeface="Cambria" pitchFamily="34" charset="0"/>
+                <a:ea typeface="Cambria" pitchFamily="34" charset="-122"/>
+                <a:cs typeface="Cambria" pitchFamily="34" charset="-120"/>
+              </a:rPr>
+              <a:t>ETM</a:t>
+            </a:r>
+            <a:endParaRPr lang="en-US" sz="1200" dirty="0"/>
+          </a:p>
+        </p:txBody>
+      </p:sp>
+      <p:sp>
+        <p:nvSpPr>
+          <p:cNvPr id="24" name="Shape 21"/>
+          <p:cNvSpPr/>
+          <p:nvPr/>
+        </p:nvSpPr>
+        <p:spPr>
+          <a:xfrm>
+            <a:off x="5093208" y="2176272"/>
+            <a:ext cx="3963924" cy="0"/>
+          </a:xfrm>
+          <a:prstGeom prst="line">
+            <a:avLst/>
+          </a:prstGeom>
+          <a:noFill/>
+          <a:ln w="25400">
+            <a:solidFill>
+              <a:srgbClr val="1E2761"/>
+            </a:solidFill>
+            <a:prstDash val="solid"/>
+          </a:ln>
+        </p:spPr>
+      </p:sp>
+      <p:sp>
+        <p:nvSpPr>
+          <p:cNvPr id="25" name="Shape 22"/>
+          <p:cNvSpPr/>
+          <p:nvPr/>
+        </p:nvSpPr>
+        <p:spPr>
+          <a:xfrm>
+            <a:off x="5029200" y="2112264"/>
+            <a:ext cx="128016" cy="128016"/>
+          </a:xfrm>
+          <a:prstGeom prst="ellipse">
+            <a:avLst/>
+          </a:prstGeom>
+          <a:solidFill>
+            <a:srgbClr val="CADCFC"/>
+          </a:solidFill>
+          <a:ln/>
+        </p:spPr>
+      </p:sp>
+      <p:sp>
+        <p:nvSpPr>
+          <p:cNvPr id="26" name="Shape 23"/>
+          <p:cNvSpPr/>
+          <p:nvPr/>
+        </p:nvSpPr>
+        <p:spPr>
+          <a:xfrm>
+            <a:off x="8993124" y="2112264"/>
+            <a:ext cx="128016" cy="128016"/>
+          </a:xfrm>
+          <a:prstGeom prst="ellipse">
+            <a:avLst/>
+          </a:prstGeom>
+          <a:solidFill>
+            <a:srgbClr val="1E2761"/>
+          </a:solidFill>
+          <a:ln/>
+        </p:spPr>
+      </p:sp>
+      <p:sp>
+        <p:nvSpPr>
+          <p:cNvPr id="27" name="Text 24"/>
+          <p:cNvSpPr/>
+          <p:nvPr/>
+        </p:nvSpPr>
+        <p:spPr>
+          <a:xfrm>
+            <a:off x="9194292" y="2066544"/>
+            <a:ext cx="1097280" cy="274320"/>
+          </a:xfrm>
+          <a:prstGeom prst="rect">
+            <a:avLst/>
+          </a:prstGeom>
+          <a:noFill/>
+          <a:ln/>
+        </p:spPr>
+        <p:txBody>
+          <a:bodyPr wrap="square" lIns="0" tIns="0" rIns="0" bIns="0" rtlCol="0" anchor="ctr"/>
+          <a:lstStyle/>
+          <a:p>
+            <a:pPr algn="l" indent="0" marL="0">
+              <a:buNone/>
+            </a:pPr>
+            <a:r>
+              <a:rPr lang="en-US" sz="1100" b="1" dirty="0">
+                <a:solidFill>
+                  <a:srgbClr val="15803D"/>
+                </a:solidFill>
+                <a:latin typeface="Calibri" pitchFamily="34" charset="0"/>
+                <a:ea typeface="Calibri" pitchFamily="34" charset="-122"/>
+                <a:cs typeface="Calibri" pitchFamily="34" charset="-120"/>
+              </a:rPr>
+              <a:t>+169%</a:t>
+            </a:r>
+            <a:endParaRPr lang="en-US" sz="1100" dirty="0"/>
+          </a:p>
+        </p:txBody>
+      </p:sp>
+      <p:sp>
+        <p:nvSpPr>
+          <p:cNvPr id="28" name="Text 25"/>
+          <p:cNvSpPr/>
+          <p:nvPr/>
+        </p:nvSpPr>
+        <p:spPr>
+          <a:xfrm>
+            <a:off x="548640" y="2414016"/>
+            <a:ext cx="2011680" cy="274320"/>
+          </a:xfrm>
+          <a:prstGeom prst="rect">
+            <a:avLst/>
+          </a:prstGeom>
+          <a:noFill/>
+          <a:ln/>
+        </p:spPr>
+        <p:txBody>
+          <a:bodyPr wrap="square" lIns="0" tIns="0" rIns="0" bIns="0" rtlCol="0" anchor="ctr"/>
+          <a:lstStyle/>
+          <a:p>
+            <a:pPr algn="l" indent="0" marL="0">
+              <a:buNone/>
+            </a:pPr>
+            <a:r>
+              <a:rPr lang="en-US" sz="1200" b="1" dirty="0">
+                <a:solidFill>
+                  <a:srgbClr val="141B47"/>
+                </a:solidFill>
+                <a:latin typeface="Cambria" pitchFamily="34" charset="0"/>
+                <a:ea typeface="Cambria" pitchFamily="34" charset="-122"/>
+                <a:cs typeface="Cambria" pitchFamily="34" charset="-120"/>
+              </a:rPr>
+              <a:t>ROB108</a:t>
+            </a:r>
+            <a:endParaRPr lang="en-US" sz="1200" dirty="0"/>
+          </a:p>
+        </p:txBody>
+      </p:sp>
+      <p:sp>
+        <p:nvSpPr>
+          <p:cNvPr id="29" name="Shape 26"/>
+          <p:cNvSpPr/>
+          <p:nvPr/>
+        </p:nvSpPr>
+        <p:spPr>
+          <a:xfrm>
+            <a:off x="4773168" y="2523744"/>
+            <a:ext cx="2939796" cy="0"/>
+          </a:xfrm>
+          <a:prstGeom prst="line">
+            <a:avLst/>
+          </a:prstGeom>
+          <a:noFill/>
+          <a:ln w="25400">
+            <a:solidFill>
+              <a:srgbClr val="1E2761"/>
+            </a:solidFill>
+            <a:prstDash val="solid"/>
+          </a:ln>
+        </p:spPr>
+      </p:sp>
+      <p:sp>
+        <p:nvSpPr>
+          <p:cNvPr id="30" name="Shape 27"/>
+          <p:cNvSpPr/>
+          <p:nvPr/>
+        </p:nvSpPr>
+        <p:spPr>
+          <a:xfrm>
+            <a:off x="4709160" y="2459736"/>
+            <a:ext cx="128016" cy="128016"/>
+          </a:xfrm>
+          <a:prstGeom prst="ellipse">
+            <a:avLst/>
+          </a:prstGeom>
+          <a:solidFill>
+            <a:srgbClr val="CADCFC"/>
+          </a:solidFill>
+          <a:ln/>
+        </p:spPr>
+      </p:sp>
+      <p:sp>
+        <p:nvSpPr>
+          <p:cNvPr id="31" name="Shape 28"/>
+          <p:cNvSpPr/>
+          <p:nvPr/>
+        </p:nvSpPr>
+        <p:spPr>
+          <a:xfrm>
+            <a:off x="7648956" y="2459736"/>
+            <a:ext cx="128016" cy="128016"/>
+          </a:xfrm>
+          <a:prstGeom prst="ellipse">
+            <a:avLst/>
+          </a:prstGeom>
+          <a:solidFill>
+            <a:srgbClr val="1E2761"/>
+          </a:solidFill>
+          <a:ln/>
+        </p:spPr>
+      </p:sp>
+      <p:sp>
+        <p:nvSpPr>
+          <p:cNvPr id="32" name="Text 29"/>
+          <p:cNvSpPr/>
+          <p:nvPr/>
+        </p:nvSpPr>
+        <p:spPr>
+          <a:xfrm>
+            <a:off x="7850124" y="2414016"/>
+            <a:ext cx="1097280" cy="274320"/>
+          </a:xfrm>
+          <a:prstGeom prst="rect">
+            <a:avLst/>
+          </a:prstGeom>
+          <a:noFill/>
+          <a:ln/>
+        </p:spPr>
+        <p:txBody>
+          <a:bodyPr wrap="square" lIns="0" tIns="0" rIns="0" bIns="0" rtlCol="0" anchor="ctr"/>
+          <a:lstStyle/>
+          <a:p>
+            <a:pPr algn="l" indent="0" marL="0">
+              <a:buNone/>
+            </a:pPr>
+            <a:r>
+              <a:rPr lang="en-US" sz="1100" b="1" dirty="0">
+                <a:solidFill>
+                  <a:srgbClr val="15803D"/>
+                </a:solidFill>
+                <a:latin typeface="Calibri" pitchFamily="34" charset="0"/>
+                <a:ea typeface="Calibri" pitchFamily="34" charset="-122"/>
+                <a:cs typeface="Calibri" pitchFamily="34" charset="-120"/>
+              </a:rPr>
+              <a:t>+145%</a:t>
+            </a:r>
+            <a:endParaRPr lang="en-US" sz="1100" dirty="0"/>
+          </a:p>
+        </p:txBody>
+      </p:sp>
+      <p:sp>
+        <p:nvSpPr>
+          <p:cNvPr id="33" name="Text 30"/>
+          <p:cNvSpPr/>
+          <p:nvPr/>
+        </p:nvSpPr>
+        <p:spPr>
+          <a:xfrm>
+            <a:off x="548640" y="2761488"/>
+            <a:ext cx="2011680" cy="274320"/>
+          </a:xfrm>
+          <a:prstGeom prst="rect">
+            <a:avLst/>
+          </a:prstGeom>
+          <a:noFill/>
+          <a:ln/>
+        </p:spPr>
+        <p:txBody>
+          <a:bodyPr wrap="square" lIns="0" tIns="0" rIns="0" bIns="0" rtlCol="0" anchor="ctr"/>
+          <a:lstStyle/>
+          <a:p>
+            <a:pPr algn="l" indent="0" marL="0">
+              <a:buNone/>
+            </a:pPr>
+            <a:r>
+              <a:rPr lang="en-US" sz="1200" b="1" dirty="0">
+                <a:solidFill>
+                  <a:srgbClr val="141B47"/>
+                </a:solidFill>
+                <a:latin typeface="Cambria" pitchFamily="34" charset="0"/>
+                <a:ea typeface="Cambria" pitchFamily="34" charset="-122"/>
+                <a:cs typeface="Cambria" pitchFamily="34" charset="-120"/>
+              </a:rPr>
+              <a:t>Flowform</a:t>
+            </a:r>
+            <a:endParaRPr lang="en-US" sz="1200" dirty="0"/>
+          </a:p>
+        </p:txBody>
+      </p:sp>
+      <p:sp>
+        <p:nvSpPr>
+          <p:cNvPr id="34" name="Shape 31"/>
+          <p:cNvSpPr/>
+          <p:nvPr/>
+        </p:nvSpPr>
+        <p:spPr>
+          <a:xfrm>
+            <a:off x="4832604" y="2871216"/>
+            <a:ext cx="2930652" cy="0"/>
+          </a:xfrm>
+          <a:prstGeom prst="line">
+            <a:avLst/>
+          </a:prstGeom>
+          <a:noFill/>
+          <a:ln w="25400">
+            <a:solidFill>
+              <a:srgbClr val="1E2761"/>
+            </a:solidFill>
+            <a:prstDash val="solid"/>
+          </a:ln>
+        </p:spPr>
+      </p:sp>
+      <p:sp>
+        <p:nvSpPr>
+          <p:cNvPr id="35" name="Shape 32"/>
+          <p:cNvSpPr/>
+          <p:nvPr/>
+        </p:nvSpPr>
+        <p:spPr>
+          <a:xfrm>
+            <a:off x="4768596" y="2807208"/>
+            <a:ext cx="128016" cy="128016"/>
+          </a:xfrm>
+          <a:prstGeom prst="ellipse">
+            <a:avLst/>
+          </a:prstGeom>
+          <a:solidFill>
+            <a:srgbClr val="CADCFC"/>
+          </a:solidFill>
+          <a:ln/>
+        </p:spPr>
+      </p:sp>
+      <p:sp>
+        <p:nvSpPr>
+          <p:cNvPr id="36" name="Shape 33"/>
+          <p:cNvSpPr/>
+          <p:nvPr/>
+        </p:nvSpPr>
+        <p:spPr>
+          <a:xfrm>
+            <a:off x="7699248" y="2807208"/>
+            <a:ext cx="128016" cy="128016"/>
+          </a:xfrm>
+          <a:prstGeom prst="ellipse">
+            <a:avLst/>
+          </a:prstGeom>
+          <a:solidFill>
+            <a:srgbClr val="1E2761"/>
+          </a:solidFill>
+          <a:ln/>
+        </p:spPr>
+      </p:sp>
+      <p:sp>
+        <p:nvSpPr>
+          <p:cNvPr id="37" name="Text 34"/>
+          <p:cNvSpPr/>
+          <p:nvPr/>
+        </p:nvSpPr>
+        <p:spPr>
+          <a:xfrm>
+            <a:off x="7900416" y="2761488"/>
+            <a:ext cx="1097280" cy="274320"/>
+          </a:xfrm>
+          <a:prstGeom prst="rect">
+            <a:avLst/>
+          </a:prstGeom>
+          <a:noFill/>
+          <a:ln/>
+        </p:spPr>
+        <p:txBody>
+          <a:bodyPr wrap="square" lIns="0" tIns="0" rIns="0" bIns="0" rtlCol="0" anchor="ctr"/>
+          <a:lstStyle/>
+          <a:p>
+            <a:pPr algn="l" indent="0" marL="0">
+              <a:buNone/>
+            </a:pPr>
+            <a:r>
+              <a:rPr lang="en-US" sz="1100" b="1" dirty="0">
+                <a:solidFill>
+                  <a:srgbClr val="15803D"/>
+                </a:solidFill>
+                <a:latin typeface="Calibri" pitchFamily="34" charset="0"/>
+                <a:ea typeface="Calibri" pitchFamily="34" charset="-122"/>
+                <a:cs typeface="Calibri" pitchFamily="34" charset="-120"/>
+              </a:rPr>
+              <a:t>+140%</a:t>
+            </a:r>
+            <a:endParaRPr lang="en-US" sz="1100" dirty="0"/>
+          </a:p>
+        </p:txBody>
+      </p:sp>
+      <p:sp>
+        <p:nvSpPr>
+          <p:cNvPr id="38" name="Text 35"/>
+          <p:cNvSpPr/>
+          <p:nvPr/>
+        </p:nvSpPr>
+        <p:spPr>
+          <a:xfrm>
+            <a:off x="548640" y="3108960"/>
+            <a:ext cx="2011680" cy="274320"/>
+          </a:xfrm>
+          <a:prstGeom prst="rect">
+            <a:avLst/>
+          </a:prstGeom>
+          <a:noFill/>
+          <a:ln/>
+        </p:spPr>
+        <p:txBody>
+          <a:bodyPr wrap="square" lIns="0" tIns="0" rIns="0" bIns="0" rtlCol="0" anchor="ctr"/>
+          <a:lstStyle/>
+          <a:p>
+            <a:pPr algn="l" indent="0" marL="0">
+              <a:buNone/>
+            </a:pPr>
+            <a:r>
+              <a:rPr lang="en-US" sz="1200" b="1" dirty="0">
+                <a:solidFill>
+                  <a:srgbClr val="141B47"/>
+                </a:solidFill>
+                <a:latin typeface="Cambria" pitchFamily="34" charset="0"/>
+                <a:ea typeface="Cambria" pitchFamily="34" charset="-122"/>
+                <a:cs typeface="Cambria" pitchFamily="34" charset="-120"/>
+              </a:rPr>
+              <a:t>ROB104</a:t>
+            </a:r>
+            <a:endParaRPr lang="en-US" sz="1200" dirty="0"/>
+          </a:p>
+        </p:txBody>
+      </p:sp>
+      <p:sp>
+        <p:nvSpPr>
+          <p:cNvPr id="39" name="Shape 36"/>
+          <p:cNvSpPr/>
+          <p:nvPr/>
+        </p:nvSpPr>
+        <p:spPr>
+          <a:xfrm>
+            <a:off x="4750308" y="3218688"/>
+            <a:ext cx="2839212" cy="0"/>
+          </a:xfrm>
+          <a:prstGeom prst="line">
+            <a:avLst/>
+          </a:prstGeom>
+          <a:noFill/>
+          <a:ln w="25400">
+            <a:solidFill>
+              <a:srgbClr val="1E2761"/>
+            </a:solidFill>
+            <a:prstDash val="solid"/>
+          </a:ln>
+        </p:spPr>
+      </p:sp>
+      <p:sp>
+        <p:nvSpPr>
+          <p:cNvPr id="40" name="Shape 37"/>
+          <p:cNvSpPr/>
+          <p:nvPr/>
+        </p:nvSpPr>
+        <p:spPr>
+          <a:xfrm>
+            <a:off x="4686300" y="3154680"/>
+            <a:ext cx="128016" cy="128016"/>
+          </a:xfrm>
+          <a:prstGeom prst="ellipse">
+            <a:avLst/>
+          </a:prstGeom>
+          <a:solidFill>
+            <a:srgbClr val="CADCFC"/>
+          </a:solidFill>
+          <a:ln/>
+        </p:spPr>
+      </p:sp>
+      <p:sp>
+        <p:nvSpPr>
+          <p:cNvPr id="41" name="Shape 38"/>
+          <p:cNvSpPr/>
+          <p:nvPr/>
+        </p:nvSpPr>
+        <p:spPr>
+          <a:xfrm>
+            <a:off x="7525512" y="3154680"/>
+            <a:ext cx="128016" cy="128016"/>
+          </a:xfrm>
+          <a:prstGeom prst="ellipse">
+            <a:avLst/>
+          </a:prstGeom>
+          <a:solidFill>
+            <a:srgbClr val="1E2761"/>
+          </a:solidFill>
+          <a:ln/>
+        </p:spPr>
+      </p:sp>
+      <p:sp>
+        <p:nvSpPr>
+          <p:cNvPr id="42" name="Text 39"/>
+          <p:cNvSpPr/>
+          <p:nvPr/>
+        </p:nvSpPr>
+        <p:spPr>
+          <a:xfrm>
+            <a:off x="7726680" y="3108960"/>
+            <a:ext cx="1097280" cy="274320"/>
+          </a:xfrm>
+          <a:prstGeom prst="rect">
+            <a:avLst/>
+          </a:prstGeom>
+          <a:noFill/>
+          <a:ln/>
+        </p:spPr>
+        <p:txBody>
+          <a:bodyPr wrap="square" lIns="0" tIns="0" rIns="0" bIns="0" rtlCol="0" anchor="ctr"/>
+          <a:lstStyle/>
+          <a:p>
+            <a:pPr algn="l" indent="0" marL="0">
+              <a:buNone/>
+            </a:pPr>
+            <a:r>
+              <a:rPr lang="en-US" sz="1100" b="1" dirty="0">
+                <a:solidFill>
+                  <a:srgbClr val="15803D"/>
+                </a:solidFill>
+                <a:latin typeface="Calibri" pitchFamily="34" charset="0"/>
+                <a:ea typeface="Calibri" pitchFamily="34" charset="-122"/>
+                <a:cs typeface="Calibri" pitchFamily="34" charset="-120"/>
+              </a:rPr>
+              <a:t>+141%</a:t>
+            </a:r>
+            <a:endParaRPr lang="en-US" sz="1100" dirty="0"/>
+          </a:p>
+        </p:txBody>
+      </p:sp>
+      <p:sp>
+        <p:nvSpPr>
+          <p:cNvPr id="43" name="Text 40"/>
+          <p:cNvSpPr/>
+          <p:nvPr/>
+        </p:nvSpPr>
+        <p:spPr>
+          <a:xfrm>
+            <a:off x="548640" y="3456432"/>
+            <a:ext cx="2011680" cy="274320"/>
+          </a:xfrm>
+          <a:prstGeom prst="rect">
+            <a:avLst/>
+          </a:prstGeom>
+          <a:noFill/>
+          <a:ln/>
+        </p:spPr>
+        <p:txBody>
+          <a:bodyPr wrap="square" lIns="0" tIns="0" rIns="0" bIns="0" rtlCol="0" anchor="ctr"/>
+          <a:lstStyle/>
+          <a:p>
+            <a:pPr algn="l" indent="0" marL="0">
+              <a:buNone/>
+            </a:pPr>
+            <a:r>
+              <a:rPr lang="en-US" sz="1200" b="1" dirty="0">
+                <a:solidFill>
+                  <a:srgbClr val="141B47"/>
+                </a:solidFill>
+                <a:latin typeface="Cambria" pitchFamily="34" charset="0"/>
+                <a:ea typeface="Cambria" pitchFamily="34" charset="-122"/>
+                <a:cs typeface="Cambria" pitchFamily="34" charset="-120"/>
+              </a:rPr>
+              <a:t>N602-603</a:t>
+            </a:r>
+            <a:endParaRPr lang="en-US" sz="1200" dirty="0"/>
+          </a:p>
+        </p:txBody>
+      </p:sp>
+      <p:sp>
+        <p:nvSpPr>
+          <p:cNvPr id="44" name="Shape 41"/>
+          <p:cNvSpPr/>
+          <p:nvPr/>
+        </p:nvSpPr>
+        <p:spPr>
+          <a:xfrm>
+            <a:off x="4681728" y="3566160"/>
+            <a:ext cx="2432304" cy="0"/>
+          </a:xfrm>
+          <a:prstGeom prst="line">
+            <a:avLst/>
+          </a:prstGeom>
+          <a:noFill/>
+          <a:ln w="25400">
+            <a:solidFill>
+              <a:srgbClr val="1E2761"/>
+            </a:solidFill>
+            <a:prstDash val="solid"/>
+          </a:ln>
+        </p:spPr>
+      </p:sp>
+      <p:sp>
+        <p:nvSpPr>
+          <p:cNvPr id="45" name="Shape 42"/>
+          <p:cNvSpPr/>
+          <p:nvPr/>
+        </p:nvSpPr>
+        <p:spPr>
+          <a:xfrm>
+            <a:off x="4617720" y="3502152"/>
+            <a:ext cx="128016" cy="128016"/>
+          </a:xfrm>
+          <a:prstGeom prst="ellipse">
+            <a:avLst/>
+          </a:prstGeom>
+          <a:solidFill>
+            <a:srgbClr val="CADCFC"/>
+          </a:solidFill>
+          <a:ln/>
+        </p:spPr>
+      </p:sp>
+      <p:sp>
+        <p:nvSpPr>
+          <p:cNvPr id="46" name="Shape 43"/>
+          <p:cNvSpPr/>
+          <p:nvPr/>
+        </p:nvSpPr>
+        <p:spPr>
+          <a:xfrm>
+            <a:off x="7050024" y="3502152"/>
+            <a:ext cx="128016" cy="128016"/>
+          </a:xfrm>
+          <a:prstGeom prst="ellipse">
+            <a:avLst/>
+          </a:prstGeom>
+          <a:solidFill>
+            <a:srgbClr val="1E2761"/>
+          </a:solidFill>
+          <a:ln/>
+        </p:spPr>
+      </p:sp>
+      <p:sp>
+        <p:nvSpPr>
+          <p:cNvPr id="47" name="Text 44"/>
+          <p:cNvSpPr/>
+          <p:nvPr/>
+        </p:nvSpPr>
+        <p:spPr>
+          <a:xfrm>
+            <a:off x="7251192" y="3456432"/>
+            <a:ext cx="1097280" cy="274320"/>
+          </a:xfrm>
+          <a:prstGeom prst="rect">
+            <a:avLst/>
+          </a:prstGeom>
+          <a:noFill/>
+          <a:ln/>
+        </p:spPr>
+        <p:txBody>
+          <a:bodyPr wrap="square" lIns="0" tIns="0" rIns="0" bIns="0" rtlCol="0" anchor="ctr"/>
+          <a:lstStyle/>
+          <a:p>
+            <a:pPr algn="l" indent="0" marL="0">
+              <a:buNone/>
+            </a:pPr>
+            <a:r>
+              <a:rPr lang="en-US" sz="1100" b="1" dirty="0">
+                <a:solidFill>
+                  <a:srgbClr val="15803D"/>
+                </a:solidFill>
+                <a:latin typeface="Calibri" pitchFamily="34" charset="0"/>
+                <a:ea typeface="Calibri" pitchFamily="34" charset="-122"/>
+                <a:cs typeface="Calibri" pitchFamily="34" charset="-120"/>
+              </a:rPr>
+              <a:t>+125%</a:t>
+            </a:r>
+            <a:endParaRPr lang="en-US" sz="1100" dirty="0"/>
+          </a:p>
+        </p:txBody>
+      </p:sp>
+      <p:sp>
+        <p:nvSpPr>
+          <p:cNvPr id="48" name="Text 45"/>
+          <p:cNvSpPr/>
+          <p:nvPr/>
+        </p:nvSpPr>
+        <p:spPr>
+          <a:xfrm>
+            <a:off x="548640" y="3803904"/>
+            <a:ext cx="2011680" cy="274320"/>
+          </a:xfrm>
+          <a:prstGeom prst="rect">
+            <a:avLst/>
+          </a:prstGeom>
+          <a:noFill/>
+          <a:ln/>
+        </p:spPr>
+        <p:txBody>
+          <a:bodyPr wrap="square" lIns="0" tIns="0" rIns="0" bIns="0" rtlCol="0" anchor="ctr"/>
+          <a:lstStyle/>
+          <a:p>
+            <a:pPr algn="l" indent="0" marL="0">
+              <a:buNone/>
+            </a:pPr>
+            <a:r>
+              <a:rPr lang="en-US" sz="1200" b="1" dirty="0">
+                <a:solidFill>
+                  <a:srgbClr val="141B47"/>
+                </a:solidFill>
+                <a:latin typeface="Cambria" pitchFamily="34" charset="0"/>
+                <a:ea typeface="Cambria" pitchFamily="34" charset="-122"/>
+                <a:cs typeface="Cambria" pitchFamily="34" charset="-120"/>
+              </a:rPr>
+              <a:t>ROB109</a:t>
+            </a:r>
+            <a:endParaRPr lang="en-US" sz="1200" dirty="0"/>
+          </a:p>
+        </p:txBody>
+      </p:sp>
+      <p:sp>
+        <p:nvSpPr>
+          <p:cNvPr id="49" name="Shape 46"/>
+          <p:cNvSpPr/>
+          <p:nvPr/>
+        </p:nvSpPr>
+        <p:spPr>
+          <a:xfrm>
+            <a:off x="4521708" y="3913632"/>
+            <a:ext cx="2788920" cy="0"/>
+          </a:xfrm>
+          <a:prstGeom prst="line">
+            <a:avLst/>
+          </a:prstGeom>
+          <a:noFill/>
+          <a:ln w="25400">
+            <a:solidFill>
+              <a:srgbClr val="1E2761"/>
+            </a:solidFill>
+            <a:prstDash val="solid"/>
+          </a:ln>
+        </p:spPr>
+      </p:sp>
+      <p:sp>
+        <p:nvSpPr>
+          <p:cNvPr id="50" name="Shape 47"/>
+          <p:cNvSpPr/>
+          <p:nvPr/>
+        </p:nvSpPr>
+        <p:spPr>
+          <a:xfrm>
+            <a:off x="4457700" y="3849624"/>
+            <a:ext cx="128016" cy="128016"/>
+          </a:xfrm>
+          <a:prstGeom prst="ellipse">
+            <a:avLst/>
+          </a:prstGeom>
+          <a:solidFill>
+            <a:srgbClr val="CADCFC"/>
+          </a:solidFill>
+          <a:ln/>
+        </p:spPr>
+      </p:sp>
+      <p:sp>
+        <p:nvSpPr>
+          <p:cNvPr id="51" name="Shape 48"/>
+          <p:cNvSpPr/>
+          <p:nvPr/>
+        </p:nvSpPr>
+        <p:spPr>
+          <a:xfrm>
+            <a:off x="7246620" y="3849624"/>
+            <a:ext cx="128016" cy="128016"/>
+          </a:xfrm>
+          <a:prstGeom prst="ellipse">
+            <a:avLst/>
+          </a:prstGeom>
+          <a:solidFill>
+            <a:srgbClr val="1E2761"/>
+          </a:solidFill>
+          <a:ln/>
+        </p:spPr>
+      </p:sp>
+      <p:sp>
+        <p:nvSpPr>
+          <p:cNvPr id="52" name="Text 49"/>
+          <p:cNvSpPr/>
+          <p:nvPr/>
+        </p:nvSpPr>
+        <p:spPr>
+          <a:xfrm>
+            <a:off x="7447788" y="3803904"/>
+            <a:ext cx="1097280" cy="274320"/>
+          </a:xfrm>
+          <a:prstGeom prst="rect">
+            <a:avLst/>
+          </a:prstGeom>
+          <a:noFill/>
+          <a:ln/>
+        </p:spPr>
+        <p:txBody>
+          <a:bodyPr wrap="square" lIns="0" tIns="0" rIns="0" bIns="0" rtlCol="0" anchor="ctr"/>
+          <a:lstStyle/>
+          <a:p>
+            <a:pPr algn="l" indent="0" marL="0">
+              <a:buNone/>
+            </a:pPr>
+            <a:r>
+              <a:rPr lang="en-US" sz="1100" b="1" dirty="0">
+                <a:solidFill>
+                  <a:srgbClr val="15803D"/>
+                </a:solidFill>
+                <a:latin typeface="Calibri" pitchFamily="34" charset="0"/>
+                <a:ea typeface="Calibri" pitchFamily="34" charset="-122"/>
+                <a:cs typeface="Calibri" pitchFamily="34" charset="-120"/>
+              </a:rPr>
+              <a:t>+157%</a:t>
+            </a:r>
+            <a:endParaRPr lang="en-US" sz="1100" dirty="0"/>
+          </a:p>
+        </p:txBody>
+      </p:sp>
+      <p:sp>
+        <p:nvSpPr>
+          <p:cNvPr id="53" name="Text 50"/>
+          <p:cNvSpPr/>
+          <p:nvPr/>
+        </p:nvSpPr>
+        <p:spPr>
+          <a:xfrm>
+            <a:off x="548640" y="4151376"/>
+            <a:ext cx="2011680" cy="274320"/>
+          </a:xfrm>
+          <a:prstGeom prst="rect">
+            <a:avLst/>
+          </a:prstGeom>
+          <a:noFill/>
+          <a:ln/>
+        </p:spPr>
+        <p:txBody>
+          <a:bodyPr wrap="square" lIns="0" tIns="0" rIns="0" bIns="0" rtlCol="0" anchor="ctr"/>
+          <a:lstStyle/>
+          <a:p>
+            <a:pPr algn="l" indent="0" marL="0">
+              <a:buNone/>
+            </a:pPr>
+            <a:r>
+              <a:rPr lang="en-US" sz="1200" b="1" dirty="0">
+                <a:solidFill>
+                  <a:srgbClr val="141B47"/>
+                </a:solidFill>
+                <a:latin typeface="Cambria" pitchFamily="34" charset="0"/>
+                <a:ea typeface="Cambria" pitchFamily="34" charset="-122"/>
+                <a:cs typeface="Cambria" pitchFamily="34" charset="-120"/>
+              </a:rPr>
+              <a:t>Quench</a:t>
+            </a:r>
+            <a:endParaRPr lang="en-US" sz="1200" dirty="0"/>
+          </a:p>
+        </p:txBody>
+      </p:sp>
+      <p:sp>
+        <p:nvSpPr>
+          <p:cNvPr id="54" name="Shape 51"/>
+          <p:cNvSpPr/>
+          <p:nvPr/>
+        </p:nvSpPr>
+        <p:spPr>
+          <a:xfrm>
+            <a:off x="4668012" y="4261104"/>
+            <a:ext cx="2208276" cy="0"/>
+          </a:xfrm>
+          <a:prstGeom prst="line">
+            <a:avLst/>
+          </a:prstGeom>
+          <a:noFill/>
+          <a:ln w="25400">
+            <a:solidFill>
+              <a:srgbClr val="1E2761"/>
+            </a:solidFill>
+            <a:prstDash val="solid"/>
+          </a:ln>
+        </p:spPr>
+      </p:sp>
+      <p:sp>
+        <p:nvSpPr>
+          <p:cNvPr id="55" name="Shape 52"/>
+          <p:cNvSpPr/>
+          <p:nvPr/>
+        </p:nvSpPr>
+        <p:spPr>
+          <a:xfrm>
+            <a:off x="4604004" y="4197096"/>
+            <a:ext cx="128016" cy="128016"/>
+          </a:xfrm>
+          <a:prstGeom prst="ellipse">
+            <a:avLst/>
+          </a:prstGeom>
+          <a:solidFill>
+            <a:srgbClr val="CADCFC"/>
+          </a:solidFill>
+          <a:ln/>
+        </p:spPr>
+      </p:sp>
+      <p:sp>
+        <p:nvSpPr>
+          <p:cNvPr id="56" name="Shape 53"/>
+          <p:cNvSpPr/>
+          <p:nvPr/>
+        </p:nvSpPr>
+        <p:spPr>
+          <a:xfrm>
+            <a:off x="6812280" y="4197096"/>
+            <a:ext cx="128016" cy="128016"/>
+          </a:xfrm>
+          <a:prstGeom prst="ellipse">
+            <a:avLst/>
+          </a:prstGeom>
+          <a:solidFill>
+            <a:srgbClr val="1E2761"/>
+          </a:solidFill>
+          <a:ln/>
+        </p:spPr>
+      </p:sp>
+      <p:sp>
+        <p:nvSpPr>
+          <p:cNvPr id="57" name="Text 54"/>
+          <p:cNvSpPr/>
+          <p:nvPr/>
+        </p:nvSpPr>
+        <p:spPr>
+          <a:xfrm>
+            <a:off x="7013448" y="4151376"/>
+            <a:ext cx="1097280" cy="274320"/>
+          </a:xfrm>
+          <a:prstGeom prst="rect">
+            <a:avLst/>
+          </a:prstGeom>
+          <a:noFill/>
+          <a:ln/>
+        </p:spPr>
+        <p:txBody>
+          <a:bodyPr wrap="square" lIns="0" tIns="0" rIns="0" bIns="0" rtlCol="0" anchor="ctr"/>
+          <a:lstStyle/>
+          <a:p>
+            <a:pPr algn="l" indent="0" marL="0">
+              <a:buNone/>
+            </a:pPr>
+            <a:r>
+              <a:rPr lang="en-US" sz="1100" b="1" dirty="0">
+                <a:solidFill>
+                  <a:srgbClr val="15803D"/>
+                </a:solidFill>
+                <a:latin typeface="Calibri" pitchFamily="34" charset="0"/>
+                <a:ea typeface="Calibri" pitchFamily="34" charset="-122"/>
+                <a:cs typeface="Calibri" pitchFamily="34" charset="-120"/>
+              </a:rPr>
+              <a:t>+115%</a:t>
+            </a:r>
+            <a:endParaRPr lang="en-US" sz="1100" dirty="0"/>
+          </a:p>
+        </p:txBody>
+      </p:sp>
+      <p:sp>
+        <p:nvSpPr>
+          <p:cNvPr id="58" name="Text 55"/>
+          <p:cNvSpPr/>
+          <p:nvPr/>
+        </p:nvSpPr>
+        <p:spPr>
+          <a:xfrm>
+            <a:off x="548640" y="4498848"/>
+            <a:ext cx="2011680" cy="274320"/>
+          </a:xfrm>
+          <a:prstGeom prst="rect">
+            <a:avLst/>
+          </a:prstGeom>
+          <a:noFill/>
+          <a:ln/>
+        </p:spPr>
+        <p:txBody>
+          <a:bodyPr wrap="square" lIns="0" tIns="0" rIns="0" bIns="0" rtlCol="0" anchor="ctr"/>
+          <a:lstStyle/>
+          <a:p>
+            <a:pPr algn="l" indent="0" marL="0">
+              <a:buNone/>
+            </a:pPr>
+            <a:r>
+              <a:rPr lang="en-US" sz="1200" b="1" dirty="0">
+                <a:solidFill>
+                  <a:srgbClr val="141B47"/>
+                </a:solidFill>
+                <a:latin typeface="Cambria" pitchFamily="34" charset="0"/>
+                <a:ea typeface="Cambria" pitchFamily="34" charset="-122"/>
+                <a:cs typeface="Cambria" pitchFamily="34" charset="-120"/>
+              </a:rPr>
+              <a:t>ROB110-111</a:t>
+            </a:r>
+            <a:endParaRPr lang="en-US" sz="1200" dirty="0"/>
+          </a:p>
+        </p:txBody>
+      </p:sp>
+      <p:sp>
+        <p:nvSpPr>
+          <p:cNvPr id="59" name="Shape 56"/>
+          <p:cNvSpPr/>
+          <p:nvPr/>
+        </p:nvSpPr>
+        <p:spPr>
+          <a:xfrm>
+            <a:off x="4411980" y="4608576"/>
+            <a:ext cx="1444752" cy="0"/>
+          </a:xfrm>
+          <a:prstGeom prst="line">
+            <a:avLst/>
+          </a:prstGeom>
+          <a:noFill/>
+          <a:ln w="25400">
+            <a:solidFill>
+              <a:srgbClr val="1E2761"/>
+            </a:solidFill>
+            <a:prstDash val="solid"/>
+          </a:ln>
+        </p:spPr>
+      </p:sp>
+      <p:sp>
+        <p:nvSpPr>
+          <p:cNvPr id="60" name="Shape 57"/>
+          <p:cNvSpPr/>
+          <p:nvPr/>
+        </p:nvSpPr>
+        <p:spPr>
+          <a:xfrm>
+            <a:off x="4347972" y="4544568"/>
+            <a:ext cx="128016" cy="128016"/>
+          </a:xfrm>
+          <a:prstGeom prst="ellipse">
+            <a:avLst/>
+          </a:prstGeom>
+          <a:solidFill>
+            <a:srgbClr val="CADCFC"/>
+          </a:solidFill>
+          <a:ln/>
+        </p:spPr>
+      </p:sp>
+      <p:sp>
+        <p:nvSpPr>
+          <p:cNvPr id="61" name="Shape 58"/>
+          <p:cNvSpPr/>
+          <p:nvPr/>
+        </p:nvSpPr>
+        <p:spPr>
+          <a:xfrm>
+            <a:off x="5792724" y="4544568"/>
+            <a:ext cx="128016" cy="128016"/>
+          </a:xfrm>
+          <a:prstGeom prst="ellipse">
+            <a:avLst/>
+          </a:prstGeom>
+          <a:solidFill>
+            <a:srgbClr val="1E2761"/>
+          </a:solidFill>
+          <a:ln/>
+        </p:spPr>
+      </p:sp>
+      <p:sp>
+        <p:nvSpPr>
+          <p:cNvPr id="62" name="Text 59"/>
+          <p:cNvSpPr/>
+          <p:nvPr/>
+        </p:nvSpPr>
+        <p:spPr>
+          <a:xfrm>
+            <a:off x="5993892" y="4498848"/>
+            <a:ext cx="1097280" cy="274320"/>
+          </a:xfrm>
+          <a:prstGeom prst="rect">
+            <a:avLst/>
+          </a:prstGeom>
+          <a:noFill/>
+          <a:ln/>
+        </p:spPr>
+        <p:txBody>
+          <a:bodyPr wrap="square" lIns="0" tIns="0" rIns="0" bIns="0" rtlCol="0" anchor="ctr"/>
+          <a:lstStyle/>
+          <a:p>
+            <a:pPr algn="l" indent="0" marL="0">
+              <a:buNone/>
+            </a:pPr>
+            <a:r>
+              <a:rPr lang="en-US" sz="1100" b="1" dirty="0">
+                <a:solidFill>
+                  <a:srgbClr val="15803D"/>
+                </a:solidFill>
+                <a:latin typeface="Calibri" pitchFamily="34" charset="0"/>
+                <a:ea typeface="Calibri" pitchFamily="34" charset="-122"/>
+                <a:cs typeface="Calibri" pitchFamily="34" charset="-120"/>
+              </a:rPr>
+              <a:t>+87%</a:t>
+            </a:r>
+            <a:endParaRPr lang="en-US" sz="1100" dirty="0"/>
+          </a:p>
+        </p:txBody>
+      </p:sp>
+      <p:sp>
+        <p:nvSpPr>
+          <p:cNvPr id="63" name="Text 60"/>
+          <p:cNvSpPr/>
+          <p:nvPr/>
+        </p:nvSpPr>
+        <p:spPr>
+          <a:xfrm>
+            <a:off x="548640" y="4846320"/>
+            <a:ext cx="2011680" cy="274320"/>
+          </a:xfrm>
+          <a:prstGeom prst="rect">
+            <a:avLst/>
+          </a:prstGeom>
+          <a:noFill/>
+          <a:ln/>
+        </p:spPr>
+        <p:txBody>
+          <a:bodyPr wrap="square" lIns="0" tIns="0" rIns="0" bIns="0" rtlCol="0" anchor="ctr"/>
+          <a:lstStyle/>
+          <a:p>
+            <a:pPr algn="l" indent="0" marL="0">
+              <a:buNone/>
+            </a:pPr>
+            <a:r>
+              <a:rPr lang="en-US" sz="1200" b="1" dirty="0">
+                <a:solidFill>
+                  <a:srgbClr val="141B47"/>
+                </a:solidFill>
+                <a:latin typeface="Cambria" pitchFamily="34" charset="0"/>
+                <a:ea typeface="Cambria" pitchFamily="34" charset="-122"/>
+                <a:cs typeface="Cambria" pitchFamily="34" charset="-120"/>
+              </a:rPr>
+              <a:t>Fosfat</a:t>
+            </a:r>
+            <a:endParaRPr lang="en-US" sz="1200" dirty="0"/>
+          </a:p>
+        </p:txBody>
+      </p:sp>
+      <p:sp>
+        <p:nvSpPr>
+          <p:cNvPr id="64" name="Shape 61"/>
+          <p:cNvSpPr/>
+          <p:nvPr/>
+        </p:nvSpPr>
+        <p:spPr>
+          <a:xfrm>
+            <a:off x="3922776" y="4892040"/>
+            <a:ext cx="128016" cy="128016"/>
+          </a:xfrm>
+          <a:prstGeom prst="ellipse">
+            <a:avLst/>
+          </a:prstGeom>
+          <a:solidFill>
+            <a:srgbClr val="94A3B8"/>
+          </a:solidFill>
+          <a:ln/>
+        </p:spPr>
+      </p:sp>
+      <p:sp>
+        <p:nvSpPr>
+          <p:cNvPr id="65" name="Shape 62"/>
+          <p:cNvSpPr/>
+          <p:nvPr/>
+        </p:nvSpPr>
+        <p:spPr>
+          <a:xfrm>
+            <a:off x="3986784" y="4956048"/>
+            <a:ext cx="731520" cy="0"/>
+          </a:xfrm>
+          <a:prstGeom prst="line">
+            <a:avLst/>
+          </a:prstGeom>
+          <a:noFill/>
+          <a:ln w="19050">
+            <a:solidFill>
+              <a:srgbClr val="94A3B8"/>
+            </a:solidFill>
+            <a:prstDash val="dash"/>
+          </a:ln>
+        </p:spPr>
+      </p:sp>
+      <p:sp>
+        <p:nvSpPr>
+          <p:cNvPr id="66" name="Text 63"/>
+          <p:cNvSpPr/>
+          <p:nvPr/>
+        </p:nvSpPr>
+        <p:spPr>
+          <a:xfrm>
+            <a:off x="4809744" y="4846320"/>
+            <a:ext cx="1371600" cy="274320"/>
+          </a:xfrm>
+          <a:prstGeom prst="rect">
+            <a:avLst/>
+          </a:prstGeom>
+          <a:noFill/>
+          <a:ln/>
+        </p:spPr>
+        <p:txBody>
+          <a:bodyPr wrap="square" lIns="0" tIns="0" rIns="0" bIns="0" rtlCol="0" anchor="ctr"/>
+          <a:lstStyle/>
+          <a:p>
+            <a:pPr indent="0" marL="0">
+              <a:buNone/>
+            </a:pPr>
+            <a:r>
+              <a:rPr lang="en-US" sz="1100" b="1" i="1" dirty="0">
+                <a:solidFill>
+                  <a:srgbClr val="B91C1C"/>
+                </a:solidFill>
+                <a:latin typeface="Calibri" pitchFamily="34" charset="0"/>
+                <a:ea typeface="Calibri" pitchFamily="34" charset="-122"/>
+                <a:cs typeface="Calibri" pitchFamily="34" charset="-120"/>
+              </a:rPr>
+              <a:t>veri yok</a:t>
+            </a:r>
+            <a:endParaRPr lang="en-US" sz="1100" dirty="0"/>
+          </a:p>
+        </p:txBody>
+      </p:sp>
+      <p:sp>
+        <p:nvSpPr>
+          <p:cNvPr id="67" name="Text 64"/>
+          <p:cNvSpPr/>
+          <p:nvPr/>
+        </p:nvSpPr>
+        <p:spPr>
+          <a:xfrm>
+            <a:off x="548640" y="5193792"/>
+            <a:ext cx="2011680" cy="274320"/>
+          </a:xfrm>
+          <a:prstGeom prst="rect">
+            <a:avLst/>
+          </a:prstGeom>
+          <a:noFill/>
+          <a:ln/>
+        </p:spPr>
+        <p:txBody>
+          <a:bodyPr wrap="square" lIns="0" tIns="0" rIns="0" bIns="0" rtlCol="0" anchor="ctr"/>
+          <a:lstStyle/>
+          <a:p>
+            <a:pPr algn="l" indent="0" marL="0">
+              <a:buNone/>
+            </a:pPr>
+            <a:r>
+              <a:rPr lang="en-US" sz="1200" b="1" dirty="0">
+                <a:solidFill>
+                  <a:srgbClr val="141B47"/>
+                </a:solidFill>
+                <a:latin typeface="Cambria" pitchFamily="34" charset="0"/>
+                <a:ea typeface="Cambria" pitchFamily="34" charset="-122"/>
+                <a:cs typeface="Cambria" pitchFamily="34" charset="-120"/>
+              </a:rPr>
+              <a:t>Boya</a:t>
+            </a:r>
+            <a:endParaRPr lang="en-US" sz="1200" dirty="0"/>
+          </a:p>
+        </p:txBody>
+      </p:sp>
+      <p:sp>
+        <p:nvSpPr>
+          <p:cNvPr id="68" name="Shape 65"/>
+          <p:cNvSpPr/>
+          <p:nvPr/>
+        </p:nvSpPr>
+        <p:spPr>
+          <a:xfrm>
+            <a:off x="3813048" y="5239512"/>
+            <a:ext cx="128016" cy="128016"/>
+          </a:xfrm>
+          <a:prstGeom prst="ellipse">
+            <a:avLst/>
+          </a:prstGeom>
+          <a:solidFill>
+            <a:srgbClr val="94A3B8"/>
+          </a:solidFill>
+          <a:ln/>
+        </p:spPr>
+      </p:sp>
+      <p:sp>
+        <p:nvSpPr>
+          <p:cNvPr id="69" name="Shape 66"/>
+          <p:cNvSpPr/>
+          <p:nvPr/>
+        </p:nvSpPr>
+        <p:spPr>
+          <a:xfrm>
+            <a:off x="3877056" y="5303520"/>
+            <a:ext cx="731520" cy="0"/>
+          </a:xfrm>
+          <a:prstGeom prst="line">
+            <a:avLst/>
+          </a:prstGeom>
+          <a:noFill/>
+          <a:ln w="19050">
+            <a:solidFill>
+              <a:srgbClr val="94A3B8"/>
+            </a:solidFill>
+            <a:prstDash val="dash"/>
+          </a:ln>
+        </p:spPr>
+      </p:sp>
+      <p:sp>
+        <p:nvSpPr>
+          <p:cNvPr id="70" name="Text 67"/>
+          <p:cNvSpPr/>
+          <p:nvPr/>
+        </p:nvSpPr>
+        <p:spPr>
+          <a:xfrm>
+            <a:off x="4700016" y="5193792"/>
+            <a:ext cx="1371600" cy="274320"/>
+          </a:xfrm>
+          <a:prstGeom prst="rect">
+            <a:avLst/>
+          </a:prstGeom>
+          <a:noFill/>
+          <a:ln/>
+        </p:spPr>
+        <p:txBody>
+          <a:bodyPr wrap="square" lIns="0" tIns="0" rIns="0" bIns="0" rtlCol="0" anchor="ctr"/>
+          <a:lstStyle/>
+          <a:p>
+            <a:pPr indent="0" marL="0">
+              <a:buNone/>
+            </a:pPr>
+            <a:r>
+              <a:rPr lang="en-US" sz="1100" b="1" i="1" dirty="0">
+                <a:solidFill>
+                  <a:srgbClr val="B91C1C"/>
+                </a:solidFill>
+                <a:latin typeface="Calibri" pitchFamily="34" charset="0"/>
+                <a:ea typeface="Calibri" pitchFamily="34" charset="-122"/>
+                <a:cs typeface="Calibri" pitchFamily="34" charset="-120"/>
+              </a:rPr>
+              <a:t>veri yok</a:t>
+            </a:r>
+            <a:endParaRPr lang="en-US" sz="1100" dirty="0"/>
+          </a:p>
+        </p:txBody>
+      </p:sp>
+      <p:sp>
+        <p:nvSpPr>
+          <p:cNvPr id="71" name="Text 68"/>
           <p:cNvSpPr/>
           <p:nvPr/>
         </p:nvSpPr>
@@ -33191,7 +31709,7 @@
       </p:sp>
       <p:sp>
         <p:nvSpPr>
-          <p:cNvPr id="9" name="Text 5"/>
+          <p:cNvPr id="72" name="Text 69"/>
           <p:cNvSpPr/>
           <p:nvPr/>
         </p:nvSpPr>
